--- a/dailys/Daily_S2_Sprint1_HELIOS.pptx
+++ b/dailys/Daily_S2_Sprint1_HELIOS.pptx
@@ -3687,7 +3687,7 @@
         <p:spPr>
           <a:xfrm>
             <a:off x="457200" y="2103120"/>
-            <a:ext cx="5486400" cy="54864"/>
+            <a:ext cx="4297680" cy="54864"/>
           </a:xfrm>
           <a:prstGeom prst="rect">
             <a:avLst/>
@@ -3731,7 +3731,7 @@
         <p:spPr>
           <a:xfrm>
             <a:off x="457200" y="2240280"/>
-            <a:ext cx="5486400" cy="365760"/>
+            <a:ext cx="4297680" cy="365760"/>
           </a:xfrm>
           <a:prstGeom prst="rect">
             <a:avLst/>
@@ -3766,7 +3766,7 @@
         <p:spPr>
           <a:xfrm>
             <a:off x="457200" y="2651760"/>
-            <a:ext cx="5486400" cy="2286000"/>
+            <a:ext cx="4297680" cy="2286000"/>
           </a:xfrm>
           <a:prstGeom prst="rect">
             <a:avLst/>
@@ -3913,8 +3913,8 @@
         </p:nvSpPr>
         <p:spPr>
           <a:xfrm>
-            <a:off x="6400800" y="2103120"/>
-            <a:ext cx="5486400" cy="54864"/>
+            <a:off x="4846320" y="2103120"/>
+            <a:ext cx="4297680" cy="54864"/>
           </a:xfrm>
           <a:prstGeom prst="rect">
             <a:avLst/>
@@ -3957,8 +3957,8 @@
         </p:nvSpPr>
         <p:spPr>
           <a:xfrm>
-            <a:off x="6400800" y="2240280"/>
-            <a:ext cx="5486400" cy="365760"/>
+            <a:off x="4846320" y="2240280"/>
+            <a:ext cx="4297680" cy="365760"/>
           </a:xfrm>
           <a:prstGeom prst="rect">
             <a:avLst/>
@@ -3992,8 +3992,8 @@
         </p:nvSpPr>
         <p:spPr>
           <a:xfrm>
-            <a:off x="6400800" y="2651760"/>
-            <a:ext cx="5486400" cy="2286000"/>
+            <a:off x="4846320" y="2651760"/>
+            <a:ext cx="4297680" cy="2286000"/>
           </a:xfrm>
           <a:prstGeom prst="rect">
             <a:avLst/>
@@ -4157,16 +4157,145 @@
           </a:p>
         </p:txBody>
       </p:sp>
-      <p:sp>
-        <p:nvSpPr>
-          <p:cNvPr id="13" name="Rectangle 12"/>
+      <p:pic>
+        <p:nvPicPr>
+          <p:cNvPr id="13" name="Picture 12" descr="qr_helios_demo.png"/>
+          <p:cNvPicPr>
+            <a:picLocks noChangeAspect="1"/>
+          </p:cNvPicPr>
+          <p:nvPr/>
+        </p:nvPicPr>
+        <p:blipFill>
+          <a:blip r:embed="rId2"/>
+          <a:stretch>
+            <a:fillRect/>
+          </a:stretch>
+        </p:blipFill>
+        <p:spPr>
+          <a:xfrm>
+            <a:off x="9601200" y="2103120"/>
+            <a:ext cx="2103120" cy="2103120"/>
+          </a:xfrm>
+          <a:prstGeom prst="rect">
+            <a:avLst/>
+          </a:prstGeom>
+        </p:spPr>
+      </p:pic>
+      <p:sp>
+        <p:nvSpPr>
+          <p:cNvPr id="14" name="TextBox 13"/>
+          <p:cNvSpPr txBox="1"/>
+          <p:nvPr/>
+        </p:nvSpPr>
+        <p:spPr>
+          <a:xfrm>
+            <a:off x="9601200" y="4251960"/>
+            <a:ext cx="2103120" cy="274320"/>
+          </a:xfrm>
+          <a:prstGeom prst="rect">
+            <a:avLst/>
+          </a:prstGeom>
+          <a:noFill/>
+        </p:spPr>
+        <p:txBody>
+          <a:bodyPr wrap="square" lIns="0" rIns="0" tIns="0" bIns="0">
+            <a:spAutoFit/>
+          </a:bodyPr>
+          <a:lstStyle/>
+          <a:p>
+            <a:pPr algn="ctr"/>
+            <a:r>
+              <a:rPr sz="1000" b="1">
+                <a:solidFill>
+                  <a:srgbClr val="0A8478"/>
+                </a:solidFill>
+                <a:latin typeface="Calibri"/>
+              </a:rPr>
+              <a:t>Escanea el QR</a:t>
+            </a:r>
+          </a:p>
+        </p:txBody>
+      </p:sp>
+      <p:sp>
+        <p:nvSpPr>
+          <p:cNvPr id="15" name="TextBox 14"/>
+          <p:cNvSpPr txBox="1"/>
+          <p:nvPr/>
+        </p:nvSpPr>
+        <p:spPr>
+          <a:xfrm>
+            <a:off x="9601200" y="4526280"/>
+            <a:ext cx="2103120" cy="274320"/>
+          </a:xfrm>
+          <a:prstGeom prst="rect">
+            <a:avLst/>
+          </a:prstGeom>
+          <a:noFill/>
+        </p:spPr>
+        <p:txBody>
+          <a:bodyPr wrap="square" lIns="0" rIns="0" tIns="0" bIns="0">
+            <a:spAutoFit/>
+          </a:bodyPr>
+          <a:lstStyle/>
+          <a:p>
+            <a:pPr algn="ctr"/>
+            <a:r>
+              <a:rPr sz="800" b="0">
+                <a:solidFill>
+                  <a:srgbClr val="4A6B7A"/>
+                </a:solidFill>
+                <a:latin typeface="Calibri"/>
+              </a:rPr>
+              <a:t>helios-web-production</a:t>
+            </a:r>
+          </a:p>
+        </p:txBody>
+      </p:sp>
+      <p:sp>
+        <p:nvSpPr>
+          <p:cNvPr id="16" name="TextBox 15"/>
+          <p:cNvSpPr txBox="1"/>
+          <p:nvPr/>
+        </p:nvSpPr>
+        <p:spPr>
+          <a:xfrm>
+            <a:off x="9601200" y="4736592"/>
+            <a:ext cx="2103120" cy="274320"/>
+          </a:xfrm>
+          <a:prstGeom prst="rect">
+            <a:avLst/>
+          </a:prstGeom>
+          <a:noFill/>
+        </p:spPr>
+        <p:txBody>
+          <a:bodyPr wrap="square" lIns="0" rIns="0" tIns="0" bIns="0">
+            <a:spAutoFit/>
+          </a:bodyPr>
+          <a:lstStyle/>
+          <a:p>
+            <a:pPr algn="ctr"/>
+            <a:r>
+              <a:rPr sz="800" b="0">
+                <a:solidFill>
+                  <a:srgbClr val="4A6B7A"/>
+                </a:solidFill>
+                <a:latin typeface="Calibri"/>
+              </a:rPr>
+              <a:t>.up.railway.app</a:t>
+            </a:r>
+          </a:p>
+        </p:txBody>
+      </p:sp>
+      <p:sp>
+        <p:nvSpPr>
+          <p:cNvPr id="17" name="Rectangle 16"/>
           <p:cNvSpPr/>
           <p:nvPr/>
         </p:nvSpPr>
         <p:spPr>
           <a:xfrm>
-            <a:off x="457200" y="5120640"/>
-            <a:ext cx="11247120" cy="1097280"/>
+            <a:off x="457200" y="5212080"/>
+            <a:ext cx="11247120" cy="1005840"/>
           </a:xfrm>
           <a:prstGeom prst="rect">
             <a:avLst/>
@@ -4203,14 +4332,14 @@
       </p:sp>
       <p:sp>
         <p:nvSpPr>
-          <p:cNvPr id="14" name="Rectangle 13"/>
+          <p:cNvPr id="18" name="Rectangle 17"/>
           <p:cNvSpPr/>
           <p:nvPr/>
         </p:nvSpPr>
         <p:spPr>
           <a:xfrm>
-            <a:off x="457200" y="5120640"/>
-            <a:ext cx="91440" cy="1097280"/>
+            <a:off x="457200" y="5212080"/>
+            <a:ext cx="91440" cy="1005840"/>
           </a:xfrm>
           <a:prstGeom prst="rect">
             <a:avLst/>
@@ -4247,13 +4376,13 @@
       </p:sp>
       <p:sp>
         <p:nvSpPr>
-          <p:cNvPr id="15" name="TextBox 14"/>
-          <p:cNvSpPr txBox="1"/>
-          <p:nvPr/>
-        </p:nvSpPr>
-        <p:spPr>
-          <a:xfrm>
-            <a:off x="731520" y="5285232"/>
+          <p:cNvPr id="19" name="TextBox 18"/>
+          <p:cNvSpPr txBox="1"/>
+          <p:nvPr/>
+        </p:nvSpPr>
+        <p:spPr>
+          <a:xfrm>
+            <a:off x="731520" y="5376672"/>
             <a:ext cx="2194560" cy="457200"/>
           </a:xfrm>
           <a:prstGeom prst="rect">
@@ -4275,20 +4404,20 @@
                 </a:solidFill>
                 <a:latin typeface="Calibri"/>
               </a:rPr>
-              <a:t>28</a:t>
-            </a:r>
-          </a:p>
-        </p:txBody>
-      </p:sp>
-      <p:sp>
-        <p:nvSpPr>
-          <p:cNvPr id="16" name="TextBox 15"/>
-          <p:cNvSpPr txBox="1"/>
-          <p:nvPr/>
-        </p:nvSpPr>
-        <p:spPr>
-          <a:xfrm>
-            <a:off x="731520" y="5779008"/>
+              <a:t>32</a:t>
+            </a:r>
+          </a:p>
+        </p:txBody>
+      </p:sp>
+      <p:sp>
+        <p:nvSpPr>
+          <p:cNvPr id="20" name="TextBox 19"/>
+          <p:cNvSpPr txBox="1"/>
+          <p:nvPr/>
+        </p:nvSpPr>
+        <p:spPr>
+          <a:xfrm>
+            <a:off x="731520" y="5852160"/>
             <a:ext cx="2194560" cy="365760"/>
           </a:xfrm>
           <a:prstGeom prst="rect">
@@ -4310,20 +4439,20 @@
                 </a:solidFill>
                 <a:latin typeface="Calibri"/>
               </a:rPr>
-              <a:t>archivos TS/TSX nuevos</a:t>
-            </a:r>
-          </a:p>
-        </p:txBody>
-      </p:sp>
-      <p:sp>
-        <p:nvSpPr>
-          <p:cNvPr id="17" name="TextBox 16"/>
-          <p:cNvSpPr txBox="1"/>
-          <p:nvPr/>
-        </p:nvSpPr>
-        <p:spPr>
-          <a:xfrm>
-            <a:off x="2926080" y="5285232"/>
+              <a:t>archivos TS/TSX</a:t>
+            </a:r>
+          </a:p>
+        </p:txBody>
+      </p:sp>
+      <p:sp>
+        <p:nvSpPr>
+          <p:cNvPr id="21" name="TextBox 20"/>
+          <p:cNvSpPr txBox="1"/>
+          <p:nvPr/>
+        </p:nvSpPr>
+        <p:spPr>
+          <a:xfrm>
+            <a:off x="2926080" y="5376672"/>
             <a:ext cx="2194560" cy="457200"/>
           </a:xfrm>
           <a:prstGeom prst="rect">
@@ -4352,13 +4481,13 @@
       </p:sp>
       <p:sp>
         <p:nvSpPr>
-          <p:cNvPr id="18" name="TextBox 17"/>
-          <p:cNvSpPr txBox="1"/>
-          <p:nvPr/>
-        </p:nvSpPr>
-        <p:spPr>
-          <a:xfrm>
-            <a:off x="2926080" y="5779008"/>
+          <p:cNvPr id="22" name="TextBox 21"/>
+          <p:cNvSpPr txBox="1"/>
+          <p:nvPr/>
+        </p:nvSpPr>
+        <p:spPr>
+          <a:xfrm>
+            <a:off x="2926080" y="5852160"/>
             <a:ext cx="2194560" cy="365760"/>
           </a:xfrm>
           <a:prstGeom prst="rect">
@@ -4380,20 +4509,20 @@
                 </a:solidFill>
                 <a:latin typeface="Calibri"/>
               </a:rPr>
-              <a:t>tests automatizados</a:t>
-            </a:r>
-          </a:p>
-        </p:txBody>
-      </p:sp>
-      <p:sp>
-        <p:nvSpPr>
-          <p:cNvPr id="19" name="TextBox 18"/>
-          <p:cNvSpPr txBox="1"/>
-          <p:nvPr/>
-        </p:nvSpPr>
-        <p:spPr>
-          <a:xfrm>
-            <a:off x="5120640" y="5285232"/>
+              <a:t>tests pasando</a:t>
+            </a:r>
+          </a:p>
+        </p:txBody>
+      </p:sp>
+      <p:sp>
+        <p:nvSpPr>
+          <p:cNvPr id="23" name="TextBox 22"/>
+          <p:cNvSpPr txBox="1"/>
+          <p:nvPr/>
+        </p:nvSpPr>
+        <p:spPr>
+          <a:xfrm>
+            <a:off x="5120640" y="5376672"/>
             <a:ext cx="2194560" cy="457200"/>
           </a:xfrm>
           <a:prstGeom prst="rect">
@@ -4422,13 +4551,13 @@
       </p:sp>
       <p:sp>
         <p:nvSpPr>
-          <p:cNvPr id="20" name="TextBox 19"/>
-          <p:cNvSpPr txBox="1"/>
-          <p:nvPr/>
-        </p:nvSpPr>
-        <p:spPr>
-          <a:xfrm>
-            <a:off x="5120640" y="5779008"/>
+          <p:cNvPr id="24" name="TextBox 23"/>
+          <p:cNvSpPr txBox="1"/>
+          <p:nvPr/>
+        </p:nvSpPr>
+        <p:spPr>
+          <a:xfrm>
+            <a:off x="5120640" y="5852160"/>
             <a:ext cx="2194560" cy="365760"/>
           </a:xfrm>
           <a:prstGeom prst="rect">
@@ -4450,20 +4579,20 @@
                 </a:solidFill>
                 <a:latin typeface="Calibri"/>
               </a:rPr>
-              <a:t>cobertura statements</a:t>
-            </a:r>
-          </a:p>
-        </p:txBody>
-      </p:sp>
-      <p:sp>
-        <p:nvSpPr>
-          <p:cNvPr id="21" name="TextBox 20"/>
-          <p:cNvSpPr txBox="1"/>
-          <p:nvPr/>
-        </p:nvSpPr>
-        <p:spPr>
-          <a:xfrm>
-            <a:off x="7315200" y="5285232"/>
+              <a:t>cobertura stmts</a:t>
+            </a:r>
+          </a:p>
+        </p:txBody>
+      </p:sp>
+      <p:sp>
+        <p:nvSpPr>
+          <p:cNvPr id="25" name="TextBox 24"/>
+          <p:cNvSpPr txBox="1"/>
+          <p:nvPr/>
+        </p:nvSpPr>
+        <p:spPr>
+          <a:xfrm>
+            <a:off x="7315200" y="5376672"/>
             <a:ext cx="2194560" cy="457200"/>
           </a:xfrm>
           <a:prstGeom prst="rect">
@@ -4485,20 +4614,20 @@
                 </a:solidFill>
                 <a:latin typeface="Calibri"/>
               </a:rPr>
-              <a:t>100%</a:t>
-            </a:r>
-          </a:p>
-        </p:txBody>
-      </p:sp>
-      <p:sp>
-        <p:nvSpPr>
-          <p:cNvPr id="22" name="TextBox 21"/>
-          <p:cNvSpPr txBox="1"/>
-          <p:nvPr/>
-        </p:nvSpPr>
-        <p:spPr>
-          <a:xfrm>
-            <a:off x="7315200" y="5779008"/>
+              <a:t>2,700</a:t>
+            </a:r>
+          </a:p>
+        </p:txBody>
+      </p:sp>
+      <p:sp>
+        <p:nvSpPr>
+          <p:cNvPr id="26" name="TextBox 25"/>
+          <p:cNvSpPr txBox="1"/>
+          <p:nvPr/>
+        </p:nvSpPr>
+        <p:spPr>
+          <a:xfrm>
+            <a:off x="7315200" y="5852160"/>
             <a:ext cx="2194560" cy="365760"/>
           </a:xfrm>
           <a:prstGeom prst="rect">
@@ -4520,20 +4649,20 @@
                 </a:solidFill>
                 <a:latin typeface="Calibri"/>
               </a:rPr>
-              <a:t>US-01..05 implementadas</a:t>
-            </a:r>
-          </a:p>
-        </p:txBody>
-      </p:sp>
-      <p:sp>
-        <p:nvSpPr>
-          <p:cNvPr id="23" name="TextBox 22"/>
-          <p:cNvSpPr txBox="1"/>
-          <p:nvPr/>
-        </p:nvSpPr>
-        <p:spPr>
-          <a:xfrm>
-            <a:off x="9509760" y="5285232"/>
+              <a:t>horarios en BD</a:t>
+            </a:r>
+          </a:p>
+        </p:txBody>
+      </p:sp>
+      <p:sp>
+        <p:nvSpPr>
+          <p:cNvPr id="27" name="TextBox 26"/>
+          <p:cNvSpPr txBox="1"/>
+          <p:nvPr/>
+        </p:nvSpPr>
+        <p:spPr>
+          <a:xfrm>
+            <a:off x="9509760" y="5376672"/>
             <a:ext cx="2194560" cy="457200"/>
           </a:xfrm>
           <a:prstGeom prst="rect">
@@ -4555,20 +4684,20 @@
                 </a:solidFill>
                 <a:latin typeface="Calibri"/>
               </a:rPr>
-              <a:t>0</a:t>
-            </a:r>
-          </a:p>
-        </p:txBody>
-      </p:sp>
-      <p:sp>
-        <p:nvSpPr>
-          <p:cNvPr id="24" name="TextBox 23"/>
-          <p:cNvSpPr txBox="1"/>
-          <p:nvPr/>
-        </p:nvSpPr>
-        <p:spPr>
-          <a:xfrm>
-            <a:off x="9509760" y="5779008"/>
+              <a:t>5/5</a:t>
+            </a:r>
+          </a:p>
+        </p:txBody>
+      </p:sp>
+      <p:sp>
+        <p:nvSpPr>
+          <p:cNvPr id="28" name="TextBox 27"/>
+          <p:cNvSpPr txBox="1"/>
+          <p:nvPr/>
+        </p:nvSpPr>
+        <p:spPr>
+          <a:xfrm>
+            <a:off x="9509760" y="5852160"/>
             <a:ext cx="2194560" cy="365760"/>
           </a:xfrm>
           <a:prstGeom prst="rect">
@@ -4590,14 +4719,14 @@
                 </a:solidFill>
                 <a:latin typeface="Calibri"/>
               </a:rPr>
-              <a:t>vulnerabilidades críticas</a:t>
-            </a:r>
-          </a:p>
-        </p:txBody>
-      </p:sp>
-      <p:sp>
-        <p:nvSpPr>
-          <p:cNvPr id="25" name="TextBox 24"/>
+              <a:t>US implementadas</a:t>
+            </a:r>
+          </a:p>
+        </p:txBody>
+      </p:sp>
+      <p:sp>
+        <p:nvSpPr>
+          <p:cNvPr id="29" name="TextBox 28"/>
           <p:cNvSpPr txBox="1"/>
           <p:nvPr/>
         </p:nvSpPr>

--- a/dailys/Daily_S2_Sprint1_HELIOS.pptx
+++ b/dailys/Daily_S2_Sprint1_HELIOS.pptx
@@ -9825,7 +9825,7 @@
                 </a:solidFill>
                 <a:latin typeface="Calibri"/>
               </a:rPr>
-              <a:t>Cobertura branches</a:t>
+              <a:t>Cobertura lines / functions</a:t>
             </a:r>
           </a:p>
         </p:txBody>
@@ -9860,7 +9860,7 @@
                 </a:solidFill>
                 <a:latin typeface="Calibri"/>
               </a:rPr>
-              <a:t>53.71%  (≥ 50% target)</a:t>
+              <a:t>81.72% / 89.28%</a:t>
             </a:r>
           </a:p>
         </p:txBody>
@@ -10044,7 +10044,7 @@
                 </a:solidFill>
                 <a:latin typeface="Calibri"/>
               </a:rPr>
-              <a:t>Cobertura lines / functions</a:t>
+              <a:t>Tests automatizados pasando</a:t>
             </a:r>
           </a:p>
         </p:txBody>
@@ -10079,7 +10079,7 @@
                 </a:solidFill>
                 <a:latin typeface="Calibri"/>
               </a:rPr>
-              <a:t>81.72% / 89.28%</a:t>
+              <a:t>39/39 (100%)</a:t>
             </a:r>
           </a:p>
         </p:txBody>
@@ -10114,7 +10114,7 @@
                 </a:solidFill>
                 <a:latin typeface="Calibri"/>
               </a:rPr>
-              <a:t>Vitest v8</a:t>
+              <a:t>Vitest</a:t>
             </a:r>
           </a:p>
         </p:txBody>
@@ -10149,7 +10149,7 @@
                 </a:solidFill>
                 <a:latin typeface="Calibri"/>
               </a:rPr>
-              <a:t>ISTQB</a:t>
+              <a:t>TMMi</a:t>
             </a:r>
           </a:p>
         </p:txBody>
@@ -10228,7 +10228,7 @@
                 </a:solidFill>
                 <a:latin typeface="Calibri"/>
               </a:rPr>
-              <a:t>Código</a:t>
+              <a:t>No funcional</a:t>
             </a:r>
           </a:p>
         </p:txBody>
@@ -10263,7 +10263,7 @@
                 </a:solidFill>
                 <a:latin typeface="Calibri"/>
               </a:rPr>
-              <a:t>Tests automatizados pasando</a:t>
+              <a:t>Latencia P50 (Locust)</a:t>
             </a:r>
           </a:p>
         </p:txBody>
@@ -10298,7 +10298,7 @@
                 </a:solidFill>
                 <a:latin typeface="Calibri"/>
               </a:rPr>
-              <a:t>39/39 (100%)</a:t>
+              <a:t>120 ms</a:t>
             </a:r>
           </a:p>
         </p:txBody>
@@ -10333,7 +10333,7 @@
                 </a:solidFill>
                 <a:latin typeface="Calibri"/>
               </a:rPr>
-              <a:t>Vitest</a:t>
+              <a:t>Locust 2.31</a:t>
             </a:r>
           </a:p>
         </p:txBody>
@@ -10368,7 +10368,7 @@
                 </a:solidFill>
                 <a:latin typeface="Calibri"/>
               </a:rPr>
-              <a:t>TMMi</a:t>
+              <a:t>ISTQB rendimiento</a:t>
             </a:r>
           </a:p>
         </p:txBody>
@@ -10447,7 +10447,7 @@
                 </a:solidFill>
                 <a:latin typeface="Calibri"/>
               </a:rPr>
-              <a:t>Código</a:t>
+              <a:t>No funcional</a:t>
             </a:r>
           </a:p>
         </p:txBody>
@@ -10482,7 +10482,7 @@
                 </a:solidFill>
                 <a:latin typeface="Calibri"/>
               </a:rPr>
-              <a:t>Vulnerabilidades críticas</a:t>
+              <a:t>Latencia P95 (Locust)</a:t>
             </a:r>
           </a:p>
         </p:txBody>
@@ -10517,7 +10517,7 @@
                 </a:solidFill>
                 <a:latin typeface="Calibri"/>
               </a:rPr>
-              <a:t>0 (pendiente confirmar SonarCloud)</a:t>
+              <a:t>300 ms  (target &lt;2000 ms)</a:t>
             </a:r>
           </a:p>
         </p:txBody>
@@ -10552,7 +10552,7 @@
                 </a:solidFill>
                 <a:latin typeface="Calibri"/>
               </a:rPr>
-              <a:t>SonarCloud</a:t>
+              <a:t>Locust 2.31</a:t>
             </a:r>
           </a:p>
         </p:txBody>
@@ -10587,7 +10587,7 @@
                 </a:solidFill>
                 <a:latin typeface="Calibri"/>
               </a:rPr>
-              <a:t>ISTQB</a:t>
+              <a:t>ISTQB rendimiento</a:t>
             </a:r>
           </a:p>
         </p:txBody>
@@ -10666,7 +10666,7 @@
                 </a:solidFill>
                 <a:latin typeface="Calibri"/>
               </a:rPr>
-              <a:t>Clásicas (Pressman)</a:t>
+              <a:t>No funcional</a:t>
             </a:r>
           </a:p>
         </p:txBody>
@@ -10701,7 +10701,7 @@
                 </a:solidFill>
                 <a:latin typeface="Calibri"/>
               </a:rPr>
-              <a:t>KLOC del Sprint</a:t>
+              <a:t>Tasa de error bajo carga</a:t>
             </a:r>
           </a:p>
         </p:txBody>
@@ -10736,7 +10736,7 @@
                 </a:solidFill>
                 <a:latin typeface="Calibri"/>
               </a:rPr>
-              <a:t>≈ 1.4 KLOC</a:t>
+              <a:t>0/6.105 = 0.00%</a:t>
             </a:r>
           </a:p>
         </p:txBody>
@@ -10771,7 +10771,7 @@
                 </a:solidFill>
                 <a:latin typeface="Calibri"/>
               </a:rPr>
-              <a:t>cloc / SonarCloud</a:t>
+              <a:t>Locust 2.31</a:t>
             </a:r>
           </a:p>
         </p:txBody>
@@ -10806,7 +10806,7 @@
                 </a:solidFill>
                 <a:latin typeface="Calibri"/>
               </a:rPr>
-              <a:t>Pressman</a:t>
+              <a:t>ISTQB</a:t>
             </a:r>
           </a:p>
         </p:txBody>
@@ -10885,7 +10885,7 @@
                 </a:solidFill>
                 <a:latin typeface="Calibri"/>
               </a:rPr>
-              <a:t>Clásicas (Pressman)</a:t>
+              <a:t>No funcional</a:t>
             </a:r>
           </a:p>
         </p:txBody>
@@ -10920,7 +10920,7 @@
                 </a:solidFill>
                 <a:latin typeface="Calibri"/>
               </a:rPr>
-              <a:t>Productividad</a:t>
+              <a:t>Throughput sostenido</a:t>
             </a:r>
           </a:p>
         </p:txBody>
@@ -10955,7 +10955,7 @@
                 </a:solidFill>
                 <a:latin typeface="Calibri"/>
               </a:rPr>
-              <a:t>0.28 KLOC/persona</a:t>
+              <a:t>103.85 req/s</a:t>
             </a:r>
           </a:p>
         </p:txBody>
@@ -10990,7 +10990,7 @@
                 </a:solidFill>
                 <a:latin typeface="Calibri"/>
               </a:rPr>
-              <a:t>Cálculo manual</a:t>
+              <a:t>Locust 2.31</a:t>
             </a:r>
           </a:p>
         </p:txBody>
@@ -11025,7 +11025,7 @@
                 </a:solidFill>
                 <a:latin typeface="Calibri"/>
               </a:rPr>
-              <a:t>Pressman</a:t>
+              <a:t>ISTQB</a:t>
             </a:r>
           </a:p>
         </p:txBody>
@@ -11104,7 +11104,7 @@
                 </a:solidFill>
                 <a:latin typeface="Calibri"/>
               </a:rPr>
-              <a:t>Proceso</a:t>
+              <a:t>Clásicas (Pressman)</a:t>
             </a:r>
           </a:p>
         </p:txBody>
@@ -11139,7 +11139,7 @@
                 </a:solidFill>
                 <a:latin typeface="Calibri"/>
               </a:rPr>
-              <a:t>Ciclo de medición Goal→Metric→Acción</a:t>
+              <a:t>KLOC del Sprint</a:t>
             </a:r>
           </a:p>
         </p:txBody>
@@ -11174,7 +11174,7 @@
                 </a:solidFill>
                 <a:latin typeface="Calibri"/>
               </a:rPr>
-              <a:t>Documentado en este daily</a:t>
+              <a:t>≈ 1.4 KLOC</a:t>
             </a:r>
           </a:p>
         </p:txBody>
@@ -11209,7 +11209,7 @@
                 </a:solidFill>
                 <a:latin typeface="Calibri"/>
               </a:rPr>
-              <a:t>Daily Scrum semanal</a:t>
+              <a:t>cloc / SonarCloud</a:t>
             </a:r>
           </a:p>
         </p:txBody>
@@ -11244,7 +11244,7 @@
                 </a:solidFill>
                 <a:latin typeface="Calibri"/>
               </a:rPr>
-              <a:t>TQM mejora continua</a:t>
+              <a:t>Pressman</a:t>
             </a:r>
           </a:p>
         </p:txBody>
@@ -11252,6 +11252,444 @@
       <p:sp>
         <p:nvSpPr>
           <p:cNvPr id="91" name="Rectangle 90"/>
+          <p:cNvSpPr/>
+          <p:nvPr/>
+        </p:nvSpPr>
+        <p:spPr>
+          <a:xfrm>
+            <a:off x="457200" y="6446520"/>
+            <a:ext cx="11247120" cy="320040"/>
+          </a:xfrm>
+          <a:prstGeom prst="rect">
+            <a:avLst/>
+          </a:prstGeom>
+          <a:solidFill>
+            <a:srgbClr val="ECF2F4"/>
+          </a:solidFill>
+          <a:ln>
+            <a:noFill/>
+          </a:ln>
+          <a:effectLst/>
+        </p:spPr>
+        <p:style>
+          <a:lnRef idx="1">
+            <a:schemeClr val="accent1"/>
+          </a:lnRef>
+          <a:fillRef idx="3">
+            <a:schemeClr val="accent1"/>
+          </a:fillRef>
+          <a:effectRef idx="2">
+            <a:schemeClr val="accent1"/>
+          </a:effectRef>
+          <a:fontRef idx="minor">
+            <a:schemeClr val="lt1"/>
+          </a:fontRef>
+        </p:style>
+        <p:txBody>
+          <a:bodyPr rtlCol="0" anchor="ctr"/>
+          <a:lstStyle/>
+          <a:p>
+            <a:pPr algn="ctr"/>
+          </a:p>
+        </p:txBody>
+      </p:sp>
+      <p:sp>
+        <p:nvSpPr>
+          <p:cNvPr id="92" name="TextBox 91"/>
+          <p:cNvSpPr txBox="1"/>
+          <p:nvPr/>
+        </p:nvSpPr>
+        <p:spPr>
+          <a:xfrm>
+            <a:off x="548640" y="6501384"/>
+            <a:ext cx="1737360" cy="274320"/>
+          </a:xfrm>
+          <a:prstGeom prst="rect">
+            <a:avLst/>
+          </a:prstGeom>
+          <a:noFill/>
+        </p:spPr>
+        <p:txBody>
+          <a:bodyPr wrap="square" lIns="0" rIns="0" tIns="0" bIns="0">
+            <a:spAutoFit/>
+          </a:bodyPr>
+          <a:lstStyle/>
+          <a:p>
+            <a:pPr algn="l"/>
+            <a:r>
+              <a:rPr sz="900" b="1">
+                <a:solidFill>
+                  <a:srgbClr val="0A8478"/>
+                </a:solidFill>
+                <a:latin typeface="Calibri"/>
+              </a:rPr>
+              <a:t>Clásicas (Pressman)</a:t>
+            </a:r>
+          </a:p>
+        </p:txBody>
+      </p:sp>
+      <p:sp>
+        <p:nvSpPr>
+          <p:cNvPr id="93" name="TextBox 92"/>
+          <p:cNvSpPr txBox="1"/>
+          <p:nvPr/>
+        </p:nvSpPr>
+        <p:spPr>
+          <a:xfrm>
+            <a:off x="2377440" y="6501384"/>
+            <a:ext cx="3108960" cy="274320"/>
+          </a:xfrm>
+          <a:prstGeom prst="rect">
+            <a:avLst/>
+          </a:prstGeom>
+          <a:noFill/>
+        </p:spPr>
+        <p:txBody>
+          <a:bodyPr wrap="square" lIns="0" rIns="0" tIns="0" bIns="0">
+            <a:spAutoFit/>
+          </a:bodyPr>
+          <a:lstStyle/>
+          <a:p>
+            <a:pPr algn="l"/>
+            <a:r>
+              <a:rPr sz="900" b="0">
+                <a:solidFill>
+                  <a:srgbClr val="0F2A36"/>
+                </a:solidFill>
+                <a:latin typeface="Calibri"/>
+              </a:rPr>
+              <a:t>Productividad</a:t>
+            </a:r>
+          </a:p>
+        </p:txBody>
+      </p:sp>
+      <p:sp>
+        <p:nvSpPr>
+          <p:cNvPr id="94" name="TextBox 93"/>
+          <p:cNvSpPr txBox="1"/>
+          <p:nvPr/>
+        </p:nvSpPr>
+        <p:spPr>
+          <a:xfrm>
+            <a:off x="5577840" y="6501384"/>
+            <a:ext cx="2468880" cy="274320"/>
+          </a:xfrm>
+          <a:prstGeom prst="rect">
+            <a:avLst/>
+          </a:prstGeom>
+          <a:noFill/>
+        </p:spPr>
+        <p:txBody>
+          <a:bodyPr wrap="square" lIns="0" rIns="0" tIns="0" bIns="0">
+            <a:spAutoFit/>
+          </a:bodyPr>
+          <a:lstStyle/>
+          <a:p>
+            <a:pPr algn="l"/>
+            <a:r>
+              <a:rPr sz="900" b="0">
+                <a:solidFill>
+                  <a:srgbClr val="0F2A36"/>
+                </a:solidFill>
+                <a:latin typeface="Calibri"/>
+              </a:rPr>
+              <a:t>0.28 KLOC/persona</a:t>
+            </a:r>
+          </a:p>
+        </p:txBody>
+      </p:sp>
+      <p:sp>
+        <p:nvSpPr>
+          <p:cNvPr id="95" name="TextBox 94"/>
+          <p:cNvSpPr txBox="1"/>
+          <p:nvPr/>
+        </p:nvSpPr>
+        <p:spPr>
+          <a:xfrm>
+            <a:off x="8138160" y="6501384"/>
+            <a:ext cx="1920240" cy="274320"/>
+          </a:xfrm>
+          <a:prstGeom prst="rect">
+            <a:avLst/>
+          </a:prstGeom>
+          <a:noFill/>
+        </p:spPr>
+        <p:txBody>
+          <a:bodyPr wrap="square" lIns="0" rIns="0" tIns="0" bIns="0">
+            <a:spAutoFit/>
+          </a:bodyPr>
+          <a:lstStyle/>
+          <a:p>
+            <a:pPr algn="l"/>
+            <a:r>
+              <a:rPr sz="900" b="0">
+                <a:solidFill>
+                  <a:srgbClr val="0F2A36"/>
+                </a:solidFill>
+                <a:latin typeface="Calibri"/>
+              </a:rPr>
+              <a:t>Cálculo manual</a:t>
+            </a:r>
+          </a:p>
+        </p:txBody>
+      </p:sp>
+      <p:sp>
+        <p:nvSpPr>
+          <p:cNvPr id="96" name="TextBox 95"/>
+          <p:cNvSpPr txBox="1"/>
+          <p:nvPr/>
+        </p:nvSpPr>
+        <p:spPr>
+          <a:xfrm>
+            <a:off x="10149840" y="6501384"/>
+            <a:ext cx="1554480" cy="274320"/>
+          </a:xfrm>
+          <a:prstGeom prst="rect">
+            <a:avLst/>
+          </a:prstGeom>
+          <a:noFill/>
+        </p:spPr>
+        <p:txBody>
+          <a:bodyPr wrap="square" lIns="0" rIns="0" tIns="0" bIns="0">
+            <a:spAutoFit/>
+          </a:bodyPr>
+          <a:lstStyle/>
+          <a:p>
+            <a:pPr algn="l"/>
+            <a:r>
+              <a:rPr sz="900" b="1">
+                <a:solidFill>
+                  <a:srgbClr val="0A8478"/>
+                </a:solidFill>
+                <a:latin typeface="Calibri"/>
+              </a:rPr>
+              <a:t>Pressman</a:t>
+            </a:r>
+          </a:p>
+        </p:txBody>
+      </p:sp>
+      <p:sp>
+        <p:nvSpPr>
+          <p:cNvPr id="97" name="Rectangle 96"/>
+          <p:cNvSpPr/>
+          <p:nvPr/>
+        </p:nvSpPr>
+        <p:spPr>
+          <a:xfrm>
+            <a:off x="457200" y="6766560"/>
+            <a:ext cx="11247120" cy="320040"/>
+          </a:xfrm>
+          <a:prstGeom prst="rect">
+            <a:avLst/>
+          </a:prstGeom>
+          <a:solidFill>
+            <a:srgbClr val="FFFFFF"/>
+          </a:solidFill>
+          <a:ln>
+            <a:noFill/>
+          </a:ln>
+          <a:effectLst/>
+        </p:spPr>
+        <p:style>
+          <a:lnRef idx="1">
+            <a:schemeClr val="accent1"/>
+          </a:lnRef>
+          <a:fillRef idx="3">
+            <a:schemeClr val="accent1"/>
+          </a:fillRef>
+          <a:effectRef idx="2">
+            <a:schemeClr val="accent1"/>
+          </a:effectRef>
+          <a:fontRef idx="minor">
+            <a:schemeClr val="lt1"/>
+          </a:fontRef>
+        </p:style>
+        <p:txBody>
+          <a:bodyPr rtlCol="0" anchor="ctr"/>
+          <a:lstStyle/>
+          <a:p>
+            <a:pPr algn="ctr"/>
+          </a:p>
+        </p:txBody>
+      </p:sp>
+      <p:sp>
+        <p:nvSpPr>
+          <p:cNvPr id="98" name="TextBox 97"/>
+          <p:cNvSpPr txBox="1"/>
+          <p:nvPr/>
+        </p:nvSpPr>
+        <p:spPr>
+          <a:xfrm>
+            <a:off x="548640" y="6821424"/>
+            <a:ext cx="1737360" cy="274320"/>
+          </a:xfrm>
+          <a:prstGeom prst="rect">
+            <a:avLst/>
+          </a:prstGeom>
+          <a:noFill/>
+        </p:spPr>
+        <p:txBody>
+          <a:bodyPr wrap="square" lIns="0" rIns="0" tIns="0" bIns="0">
+            <a:spAutoFit/>
+          </a:bodyPr>
+          <a:lstStyle/>
+          <a:p>
+            <a:pPr algn="l"/>
+            <a:r>
+              <a:rPr sz="900" b="1">
+                <a:solidFill>
+                  <a:srgbClr val="0A8478"/>
+                </a:solidFill>
+                <a:latin typeface="Calibri"/>
+              </a:rPr>
+              <a:t>Proceso</a:t>
+            </a:r>
+          </a:p>
+        </p:txBody>
+      </p:sp>
+      <p:sp>
+        <p:nvSpPr>
+          <p:cNvPr id="99" name="TextBox 98"/>
+          <p:cNvSpPr txBox="1"/>
+          <p:nvPr/>
+        </p:nvSpPr>
+        <p:spPr>
+          <a:xfrm>
+            <a:off x="2377440" y="6821424"/>
+            <a:ext cx="3108960" cy="274320"/>
+          </a:xfrm>
+          <a:prstGeom prst="rect">
+            <a:avLst/>
+          </a:prstGeom>
+          <a:noFill/>
+        </p:spPr>
+        <p:txBody>
+          <a:bodyPr wrap="square" lIns="0" rIns="0" tIns="0" bIns="0">
+            <a:spAutoFit/>
+          </a:bodyPr>
+          <a:lstStyle/>
+          <a:p>
+            <a:pPr algn="l"/>
+            <a:r>
+              <a:rPr sz="900" b="0">
+                <a:solidFill>
+                  <a:srgbClr val="0F2A36"/>
+                </a:solidFill>
+                <a:latin typeface="Calibri"/>
+              </a:rPr>
+              <a:t>Ciclo Goal→Metric→Acción</a:t>
+            </a:r>
+          </a:p>
+        </p:txBody>
+      </p:sp>
+      <p:sp>
+        <p:nvSpPr>
+          <p:cNvPr id="100" name="TextBox 99"/>
+          <p:cNvSpPr txBox="1"/>
+          <p:nvPr/>
+        </p:nvSpPr>
+        <p:spPr>
+          <a:xfrm>
+            <a:off x="5577840" y="6821424"/>
+            <a:ext cx="2468880" cy="274320"/>
+          </a:xfrm>
+          <a:prstGeom prst="rect">
+            <a:avLst/>
+          </a:prstGeom>
+          <a:noFill/>
+        </p:spPr>
+        <p:txBody>
+          <a:bodyPr wrap="square" lIns="0" rIns="0" tIns="0" bIns="0">
+            <a:spAutoFit/>
+          </a:bodyPr>
+          <a:lstStyle/>
+          <a:p>
+            <a:pPr algn="l"/>
+            <a:r>
+              <a:rPr sz="900" b="0">
+                <a:solidFill>
+                  <a:srgbClr val="0F2A36"/>
+                </a:solidFill>
+                <a:latin typeface="Calibri"/>
+              </a:rPr>
+              <a:t>Documentado en daily MD</a:t>
+            </a:r>
+          </a:p>
+        </p:txBody>
+      </p:sp>
+      <p:sp>
+        <p:nvSpPr>
+          <p:cNvPr id="101" name="TextBox 100"/>
+          <p:cNvSpPr txBox="1"/>
+          <p:nvPr/>
+        </p:nvSpPr>
+        <p:spPr>
+          <a:xfrm>
+            <a:off x="8138160" y="6821424"/>
+            <a:ext cx="1920240" cy="274320"/>
+          </a:xfrm>
+          <a:prstGeom prst="rect">
+            <a:avLst/>
+          </a:prstGeom>
+          <a:noFill/>
+        </p:spPr>
+        <p:txBody>
+          <a:bodyPr wrap="square" lIns="0" rIns="0" tIns="0" bIns="0">
+            <a:spAutoFit/>
+          </a:bodyPr>
+          <a:lstStyle/>
+          <a:p>
+            <a:pPr algn="l"/>
+            <a:r>
+              <a:rPr sz="900" b="0">
+                <a:solidFill>
+                  <a:srgbClr val="0F2A36"/>
+                </a:solidFill>
+                <a:latin typeface="Calibri"/>
+              </a:rPr>
+              <a:t>Daily Scrum semanal</a:t>
+            </a:r>
+          </a:p>
+        </p:txBody>
+      </p:sp>
+      <p:sp>
+        <p:nvSpPr>
+          <p:cNvPr id="102" name="TextBox 101"/>
+          <p:cNvSpPr txBox="1"/>
+          <p:nvPr/>
+        </p:nvSpPr>
+        <p:spPr>
+          <a:xfrm>
+            <a:off x="10149840" y="6821424"/>
+            <a:ext cx="1554480" cy="274320"/>
+          </a:xfrm>
+          <a:prstGeom prst="rect">
+            <a:avLst/>
+          </a:prstGeom>
+          <a:noFill/>
+        </p:spPr>
+        <p:txBody>
+          <a:bodyPr wrap="square" lIns="0" rIns="0" tIns="0" bIns="0">
+            <a:spAutoFit/>
+          </a:bodyPr>
+          <a:lstStyle/>
+          <a:p>
+            <a:pPr algn="l"/>
+            <a:r>
+              <a:rPr sz="900" b="1">
+                <a:solidFill>
+                  <a:srgbClr val="0A8478"/>
+                </a:solidFill>
+                <a:latin typeface="Calibri"/>
+              </a:rPr>
+              <a:t>TQM</a:t>
+            </a:r>
+          </a:p>
+        </p:txBody>
+      </p:sp>
+      <p:sp>
+        <p:nvSpPr>
+          <p:cNvPr id="103" name="Rectangle 102"/>
           <p:cNvSpPr/>
           <p:nvPr/>
         </p:nvSpPr>
@@ -11295,7 +11733,7 @@
       </p:sp>
       <p:sp>
         <p:nvSpPr>
-          <p:cNvPr id="92" name="TextBox 91"/>
+          <p:cNvPr id="104" name="TextBox 103"/>
           <p:cNvSpPr txBox="1"/>
           <p:nvPr/>
         </p:nvSpPr>

--- a/dailys/Daily_S2_Sprint1_HELIOS.pptx
+++ b/dailys/Daily_S2_Sprint1_HELIOS.pptx
@@ -10,6 +10,7 @@
     <p:sldId id="258" r:id="rId9"/>
     <p:sldId id="259" r:id="rId10"/>
     <p:sldId id="260" r:id="rId11"/>
+    <p:sldId id="261" r:id="rId12"/>
   </p:sldIdLst>
   <p:sldSz cx="12191695" cy="6858000" type="screen4x3"/>
   <p:notesSz cx="6858000" cy="9144000"/>
@@ -3330,13 +3331,67 @@
       </p:sp>
       <p:sp>
         <p:nvSpPr>
-          <p:cNvPr id="8" name="Rectangle 7"/>
+          <p:cNvPr id="8" name="Rounded Rectangle 7"/>
           <p:cNvSpPr/>
           <p:nvPr/>
         </p:nvSpPr>
         <p:spPr>
           <a:xfrm>
-            <a:off x="640080" y="4023360"/>
+            <a:off x="640080" y="3840480"/>
+            <a:ext cx="3200400" cy="365760"/>
+          </a:xfrm>
+          <a:prstGeom prst="roundRect">
+            <a:avLst>
+              <a:gd name="adj" fmla="val 50000"/>
+            </a:avLst>
+          </a:prstGeom>
+          <a:solidFill>
+            <a:srgbClr val="CA8A04"/>
+          </a:solidFill>
+          <a:ln>
+            <a:noFill/>
+          </a:ln>
+        </p:spPr>
+        <p:style>
+          <a:lnRef idx="1">
+            <a:schemeClr val="accent1"/>
+          </a:lnRef>
+          <a:fillRef idx="3">
+            <a:schemeClr val="accent1"/>
+          </a:fillRef>
+          <a:effectRef idx="2">
+            <a:schemeClr val="accent1"/>
+          </a:effectRef>
+          <a:fontRef idx="minor">
+            <a:schemeClr val="lt1"/>
+          </a:fontRef>
+        </p:style>
+        <p:txBody>
+          <a:bodyPr rtlCol="0" anchor="ctr" lIns="0" rIns="0" tIns="0" bIns="0"/>
+          <a:lstStyle/>
+          <a:p>
+            <a:pPr algn="ctr"/>
+            <a:r>
+              <a:rPr sz="900" b="1">
+                <a:solidFill>
+                  <a:srgbClr val="FFFFFF"/>
+                </a:solidFill>
+                <a:latin typeface="Calibri"/>
+              </a:rPr>
+              <a:t>ETAPA: SPRINT 1 - MVP ACADEMICO</a:t>
+            </a:r>
+          </a:p>
+        </p:txBody>
+      </p:sp>
+      <p:sp>
+        <p:nvSpPr>
+          <p:cNvPr id="9" name="Rectangle 8"/>
+          <p:cNvSpPr/>
+          <p:nvPr/>
+        </p:nvSpPr>
+        <p:spPr>
+          <a:xfrm>
+            <a:off x="640080" y="4389120"/>
             <a:ext cx="365760" cy="45720"/>
           </a:xfrm>
           <a:prstGeom prst="rect">
@@ -3374,13 +3429,13 @@
       </p:sp>
       <p:sp>
         <p:nvSpPr>
-          <p:cNvPr id="9" name="TextBox 8"/>
-          <p:cNvSpPr txBox="1"/>
-          <p:nvPr/>
-        </p:nvSpPr>
-        <p:spPr>
-          <a:xfrm>
-            <a:off x="640080" y="4206240"/>
+          <p:cNvPr id="10" name="TextBox 9"/>
+          <p:cNvSpPr txBox="1"/>
+          <p:nvPr/>
+        </p:nvSpPr>
+        <p:spPr>
+          <a:xfrm>
+            <a:off x="640080" y="4572000"/>
             <a:ext cx="4572000" cy="365760"/>
           </a:xfrm>
           <a:prstGeom prst="rect">
@@ -3409,13 +3464,13 @@
       </p:sp>
       <p:sp>
         <p:nvSpPr>
-          <p:cNvPr id="10" name="TextBox 9"/>
-          <p:cNvSpPr txBox="1"/>
-          <p:nvPr/>
-        </p:nvSpPr>
-        <p:spPr>
-          <a:xfrm>
-            <a:off x="640080" y="4572000"/>
+          <p:cNvPr id="11" name="TextBox 10"/>
+          <p:cNvSpPr txBox="1"/>
+          <p:nvPr/>
+        </p:nvSpPr>
+        <p:spPr>
+          <a:xfrm>
+            <a:off x="640080" y="4937760"/>
             <a:ext cx="10515600" cy="457200"/>
           </a:xfrm>
           <a:prstGeom prst="rect">
@@ -3444,7 +3499,7 @@
       </p:sp>
       <p:sp>
         <p:nvSpPr>
-          <p:cNvPr id="11" name="TextBox 10"/>
+          <p:cNvPr id="12" name="TextBox 11"/>
           <p:cNvSpPr txBox="1"/>
           <p:nvPr/>
         </p:nvSpPr>
@@ -3603,7 +3658,7 @@
                 </a:solidFill>
                 <a:latin typeface="Calibri"/>
               </a:rPr>
-              <a:t>2 / 5</a:t>
+              <a:t>2 / 6</a:t>
             </a:r>
           </a:p>
         </p:txBody>
@@ -3673,7 +3728,7 @@
                 </a:solidFill>
                 <a:latin typeface="Calibri"/>
               </a:rPr>
-              <a:t>Pasamos de Sprint 0 (documentación) a producto funcional desplegado</a:t>
+              <a:t>Pasamos de Sprint 0 (documentación) a MVP académico funcional para validación con compañeros</a:t>
             </a:r>
           </a:p>
         </p:txBody>
@@ -3800,7 +3855,7 @@
                 </a:solidFill>
                 <a:latin typeface="Calibri"/>
               </a:rPr>
-              <a:t>Schema PostgreSQL ejecutado en Supabase (7 tablas + RLS + RPC atómica)</a:t>
+              <a:t>Schema PostgreSQL ejecutado: 7 tablas + RLS + RPC atómica</a:t>
             </a:r>
           </a:p>
           <a:p>
@@ -4885,7 +4940,7 @@
                 </a:solidFill>
                 <a:latin typeface="Calibri"/>
               </a:rPr>
-              <a:t>3 / 5</a:t>
+              <a:t>3 / 6</a:t>
             </a:r>
           </a:p>
         </p:txBody>
@@ -6637,7 +6692,7 @@
                 </a:solidFill>
                 <a:latin typeface="Calibri"/>
               </a:rPr>
-              <a:t>4 / 5</a:t>
+              <a:t>4 / 6</a:t>
             </a:r>
           </a:p>
         </p:txBody>
@@ -8038,7 +8093,7 @@
                 </a:solidFill>
                 <a:latin typeface="Calibri"/>
               </a:rPr>
-              <a:t>APLICACIÓN DE LA UNIDAD II — ISTQB · TMMI · TQM</a:t>
+              <a:t>EVIDENCIAS DE HERRAMIENTAS — BACKLOG JIRA HELL</a:t>
             </a:r>
           </a:p>
         </p:txBody>
@@ -8108,7 +8163,392 @@
                 </a:solidFill>
                 <a:latin typeface="Calibri"/>
               </a:rPr>
-              <a:t>5 / 5</a:t>
+              <a:t>5 / 6</a:t>
+            </a:r>
+          </a:p>
+        </p:txBody>
+      </p:sp>
+      <p:sp>
+        <p:nvSpPr>
+          <p:cNvPr id="5" name="TextBox 4"/>
+          <p:cNvSpPr txBox="1"/>
+          <p:nvPr/>
+        </p:nvSpPr>
+        <p:spPr>
+          <a:xfrm>
+            <a:off x="457200" y="731520"/>
+            <a:ext cx="10972800" cy="640080"/>
+          </a:xfrm>
+          <a:prstGeom prst="rect">
+            <a:avLst/>
+          </a:prstGeom>
+          <a:noFill/>
+        </p:spPr>
+        <p:txBody>
+          <a:bodyPr wrap="square" lIns="0" rIns="0" tIns="0" bIns="0">
+            <a:spAutoFit/>
+          </a:bodyPr>
+          <a:lstStyle/>
+          <a:p>
+            <a:pPr algn="l"/>
+            <a:r>
+              <a:rPr sz="2800" b="1">
+                <a:solidFill>
+                  <a:srgbClr val="0A4F6B"/>
+                </a:solidFill>
+                <a:latin typeface="Calibri"/>
+              </a:rPr>
+              <a:t>Tablero de tareas en Jira (proyecto HELL)</a:t>
+            </a:r>
+          </a:p>
+        </p:txBody>
+      </p:sp>
+      <p:sp>
+        <p:nvSpPr>
+          <p:cNvPr id="6" name="TextBox 5"/>
+          <p:cNvSpPr txBox="1"/>
+          <p:nvPr/>
+        </p:nvSpPr>
+        <p:spPr>
+          <a:xfrm>
+            <a:off x="457200" y="1417320"/>
+            <a:ext cx="10972800" cy="365760"/>
+          </a:xfrm>
+          <a:prstGeom prst="rect">
+            <a:avLst/>
+          </a:prstGeom>
+          <a:noFill/>
+        </p:spPr>
+        <p:txBody>
+          <a:bodyPr wrap="square" lIns="0" rIns="0" tIns="0" bIns="0">
+            <a:spAutoFit/>
+          </a:bodyPr>
+          <a:lstStyle/>
+          <a:p>
+            <a:pPr algn="l"/>
+            <a:r>
+              <a:rPr sz="1300" b="0">
+                <a:solidFill>
+                  <a:srgbClr val="4A6B7A"/>
+                </a:solidFill>
+                <a:latin typeface="Calibri"/>
+              </a:rPr>
+              <a:t>15 issues creadas via API · 10 Done · 2 In Progress · 3 To Do · 53 Story Points</a:t>
+            </a:r>
+          </a:p>
+        </p:txBody>
+      </p:sp>
+      <p:sp>
+        <p:nvSpPr>
+          <p:cNvPr id="7" name="Rectangle 6"/>
+          <p:cNvSpPr/>
+          <p:nvPr/>
+        </p:nvSpPr>
+        <p:spPr>
+          <a:xfrm>
+            <a:off x="457200" y="1920240"/>
+            <a:ext cx="11247120" cy="4297680"/>
+          </a:xfrm>
+          <a:prstGeom prst="rect">
+            <a:avLst/>
+          </a:prstGeom>
+          <a:solidFill>
+            <a:srgbClr val="FFFFFF"/>
+          </a:solidFill>
+          <a:ln>
+            <a:solidFill>
+              <a:srgbClr val="0A8478"/>
+            </a:solidFill>
+          </a:ln>
+          <a:effectLst/>
+        </p:spPr>
+        <p:style>
+          <a:lnRef idx="1">
+            <a:schemeClr val="accent1"/>
+          </a:lnRef>
+          <a:fillRef idx="3">
+            <a:schemeClr val="accent1"/>
+          </a:fillRef>
+          <a:effectRef idx="2">
+            <a:schemeClr val="accent1"/>
+          </a:effectRef>
+          <a:fontRef idx="minor">
+            <a:schemeClr val="lt1"/>
+          </a:fontRef>
+        </p:style>
+        <p:txBody>
+          <a:bodyPr rtlCol="0" anchor="ctr"/>
+          <a:lstStyle/>
+          <a:p>
+            <a:pPr algn="ctr"/>
+          </a:p>
+        </p:txBody>
+      </p:sp>
+      <p:pic>
+        <p:nvPicPr>
+          <p:cNvPr id="8" name="Picture 7" descr="kanban_jira.png"/>
+          <p:cNvPicPr>
+            <a:picLocks noChangeAspect="1"/>
+          </p:cNvPicPr>
+          <p:nvPr/>
+        </p:nvPicPr>
+        <p:blipFill>
+          <a:blip r:embed="rId2"/>
+          <a:stretch>
+            <a:fillRect/>
+          </a:stretch>
+        </p:blipFill>
+        <p:spPr>
+          <a:xfrm>
+            <a:off x="548640" y="2011680"/>
+            <a:ext cx="11064240" cy="4114800"/>
+          </a:xfrm>
+          <a:prstGeom prst="rect">
+            <a:avLst/>
+          </a:prstGeom>
+        </p:spPr>
+      </p:pic>
+      <p:sp>
+        <p:nvSpPr>
+          <p:cNvPr id="9" name="Rectangle 8"/>
+          <p:cNvSpPr/>
+          <p:nvPr/>
+        </p:nvSpPr>
+        <p:spPr>
+          <a:xfrm>
+            <a:off x="457200" y="6355080"/>
+            <a:ext cx="11247120" cy="320040"/>
+          </a:xfrm>
+          <a:prstGeom prst="rect">
+            <a:avLst/>
+          </a:prstGeom>
+          <a:solidFill>
+            <a:srgbClr val="0A4F6B"/>
+          </a:solidFill>
+          <a:ln>
+            <a:noFill/>
+          </a:ln>
+          <a:effectLst/>
+        </p:spPr>
+        <p:style>
+          <a:lnRef idx="1">
+            <a:schemeClr val="accent1"/>
+          </a:lnRef>
+          <a:fillRef idx="3">
+            <a:schemeClr val="accent1"/>
+          </a:fillRef>
+          <a:effectRef idx="2">
+            <a:schemeClr val="accent1"/>
+          </a:effectRef>
+          <a:fontRef idx="minor">
+            <a:schemeClr val="lt1"/>
+          </a:fontRef>
+        </p:style>
+        <p:txBody>
+          <a:bodyPr rtlCol="0" anchor="ctr"/>
+          <a:lstStyle/>
+          <a:p>
+            <a:pPr algn="ctr"/>
+          </a:p>
+        </p:txBody>
+      </p:sp>
+      <p:sp>
+        <p:nvSpPr>
+          <p:cNvPr id="10" name="TextBox 9"/>
+          <p:cNvSpPr txBox="1"/>
+          <p:nvPr/>
+        </p:nvSpPr>
+        <p:spPr>
+          <a:xfrm>
+            <a:off x="640080" y="6391656"/>
+            <a:ext cx="10972800" cy="274320"/>
+          </a:xfrm>
+          <a:prstGeom prst="rect">
+            <a:avLst/>
+          </a:prstGeom>
+          <a:noFill/>
+        </p:spPr>
+        <p:txBody>
+          <a:bodyPr wrap="square" lIns="0" rIns="0" tIns="0" bIns="0">
+            <a:spAutoFit/>
+          </a:bodyPr>
+          <a:lstStyle/>
+          <a:p>
+            <a:pPr algn="l"/>
+            <a:r>
+              <a:rPr sz="1000" b="1">
+                <a:solidFill>
+                  <a:srgbClr val="FFFFFF"/>
+                </a:solidFill>
+                <a:latin typeface="Calibri"/>
+              </a:rPr>
+              <a:t>Cada issue tiene responsable, story points y descripción técnica · Backlog evidencia cumplimiento de la Unidad II punto 5</a:t>
+            </a:r>
+          </a:p>
+        </p:txBody>
+      </p:sp>
+      <p:sp>
+        <p:nvSpPr>
+          <p:cNvPr id="11" name="TextBox 10"/>
+          <p:cNvSpPr txBox="1"/>
+          <p:nvPr/>
+        </p:nvSpPr>
+        <p:spPr>
+          <a:xfrm>
+            <a:off x="457200" y="6583680"/>
+            <a:ext cx="7315200" cy="274320"/>
+          </a:xfrm>
+          <a:prstGeom prst="rect">
+            <a:avLst/>
+          </a:prstGeom>
+          <a:noFill/>
+        </p:spPr>
+        <p:txBody>
+          <a:bodyPr wrap="square" lIns="0" rIns="0" tIns="0" bIns="0">
+            <a:spAutoFit/>
+          </a:bodyPr>
+          <a:lstStyle/>
+          <a:p>
+            <a:pPr algn="l"/>
+            <a:r>
+              <a:rPr sz="900" b="0">
+                <a:solidFill>
+                  <a:srgbClr val="4A6B7A"/>
+                </a:solidFill>
+                <a:latin typeface="Calibri"/>
+              </a:rPr>
+              <a:t>HELIOS — Daily Scrum Semana 2 · Sprint 1 — UTP Calidad de Software · 2026</a:t>
+            </a:r>
+          </a:p>
+        </p:txBody>
+      </p:sp>
+    </p:spTree>
+  </p:cSld>
+  <p:clrMapOvr>
+    <a:masterClrMapping/>
+  </p:clrMapOvr>
+</p:sld>
+</file>
+
+<file path=ppt/slides/slide6.xml><?xml version="1.0" encoding="utf-8"?>
+<p:sld xmlns:a="http://schemas.openxmlformats.org/drawingml/2006/main" xmlns:p="http://schemas.openxmlformats.org/presentationml/2006/main" xmlns:r="http://schemas.openxmlformats.org/officeDocument/2006/relationships">
+  <p:cSld>
+    <p:bg>
+      <p:bgPr>
+        <a:solidFill>
+          <a:srgbClr val="F4F7F8"/>
+        </a:solidFill>
+        <a:effectLst/>
+      </p:bgPr>
+    </p:bg>
+    <p:spTree>
+      <p:nvGrpSpPr>
+        <p:cNvPr id="1" name=""/>
+        <p:cNvGrpSpPr/>
+        <p:nvPr/>
+      </p:nvGrpSpPr>
+      <p:grpSpPr/>
+      <p:sp>
+        <p:nvSpPr>
+          <p:cNvPr id="2" name="TextBox 1"/>
+          <p:cNvSpPr txBox="1"/>
+          <p:nvPr/>
+        </p:nvSpPr>
+        <p:spPr>
+          <a:xfrm>
+            <a:off x="457200" y="365760"/>
+            <a:ext cx="10972800" cy="274320"/>
+          </a:xfrm>
+          <a:prstGeom prst="rect">
+            <a:avLst/>
+          </a:prstGeom>
+          <a:noFill/>
+        </p:spPr>
+        <p:txBody>
+          <a:bodyPr wrap="square" lIns="0" rIns="0" tIns="0" bIns="0">
+            <a:spAutoFit/>
+          </a:bodyPr>
+          <a:lstStyle/>
+          <a:p>
+            <a:pPr algn="l"/>
+            <a:r>
+              <a:rPr sz="1100" b="1">
+                <a:solidFill>
+                  <a:srgbClr val="0A8478"/>
+                </a:solidFill>
+                <a:latin typeface="Calibri"/>
+              </a:rPr>
+              <a:t>APLICACIÓN DE LA UNIDAD II — ISTQB · TMMI · TQM</a:t>
+            </a:r>
+          </a:p>
+        </p:txBody>
+      </p:sp>
+      <p:sp>
+        <p:nvSpPr>
+          <p:cNvPr id="3" name="TextBox 2"/>
+          <p:cNvSpPr txBox="1"/>
+          <p:nvPr/>
+        </p:nvSpPr>
+        <p:spPr>
+          <a:xfrm>
+            <a:off x="11338560" y="365760"/>
+            <a:ext cx="731520" cy="274320"/>
+          </a:xfrm>
+          <a:prstGeom prst="rect">
+            <a:avLst/>
+          </a:prstGeom>
+          <a:noFill/>
+        </p:spPr>
+        <p:txBody>
+          <a:bodyPr wrap="square" lIns="0" rIns="0" tIns="0" bIns="0">
+            <a:spAutoFit/>
+          </a:bodyPr>
+          <a:lstStyle/>
+          <a:p>
+            <a:pPr algn="r"/>
+            <a:r>
+              <a:rPr sz="1100" b="1">
+                <a:solidFill>
+                  <a:srgbClr val="0A8478"/>
+                </a:solidFill>
+                <a:latin typeface="Calibri"/>
+              </a:rPr>
+              <a:t>P6</a:t>
+            </a:r>
+          </a:p>
+        </p:txBody>
+      </p:sp>
+      <p:sp>
+        <p:nvSpPr>
+          <p:cNvPr id="4" name="TextBox 3"/>
+          <p:cNvSpPr txBox="1"/>
+          <p:nvPr/>
+        </p:nvSpPr>
+        <p:spPr>
+          <a:xfrm>
+            <a:off x="11338560" y="6583680"/>
+            <a:ext cx="731520" cy="274320"/>
+          </a:xfrm>
+          <a:prstGeom prst="rect">
+            <a:avLst/>
+          </a:prstGeom>
+          <a:noFill/>
+        </p:spPr>
+        <p:txBody>
+          <a:bodyPr wrap="square" lIns="0" rIns="0" tIns="0" bIns="0">
+            <a:spAutoFit/>
+          </a:bodyPr>
+          <a:lstStyle/>
+          <a:p>
+            <a:pPr algn="r"/>
+            <a:r>
+              <a:rPr sz="900" b="0">
+                <a:solidFill>
+                  <a:srgbClr val="4A6B7A"/>
+                </a:solidFill>
+                <a:latin typeface="Calibri"/>
+              </a:rPr>
+              <a:t>6 / 6</a:t>
             </a:r>
           </a:p>
         </p:txBody>

--- a/dailys/Daily_S2_Sprint1_HELIOS.pptx
+++ b/dailys/Daily_S2_Sprint1_HELIOS.pptx
@@ -11579,7 +11579,7 @@
                 </a:solidFill>
                 <a:latin typeface="Calibri"/>
               </a:rPr>
-              <a:t>KLOC del Sprint</a:t>
+              <a:t>KLOC del Sprint (producto)</a:t>
             </a:r>
           </a:p>
         </p:txBody>
@@ -11614,7 +11614,7 @@
                 </a:solidFill>
                 <a:latin typeface="Calibri"/>
               </a:rPr>
-              <a:t>≈ 1.4 KLOC</a:t>
+              <a:t>1.71 KLOC medidas</a:t>
             </a:r>
           </a:p>
         </p:txBody>
@@ -11649,7 +11649,7 @@
                 </a:solidFill>
                 <a:latin typeface="Calibri"/>
               </a:rPr>
-              <a:t>cloc / SonarCloud</a:t>
+              <a:t>Script Python conteo</a:t>
             </a:r>
           </a:p>
         </p:txBody>
@@ -11833,7 +11833,7 @@
                 </a:solidFill>
                 <a:latin typeface="Calibri"/>
               </a:rPr>
-              <a:t>0.28 KLOC/persona</a:t>
+              <a:t>0.342 KLOC/persona</a:t>
             </a:r>
           </a:p>
         </p:txBody>
@@ -11868,7 +11868,7 @@
                 </a:solidFill>
                 <a:latin typeface="Calibri"/>
               </a:rPr>
-              <a:t>Cálculo manual</a:t>
+              <a:t>1.71/5 personas</a:t>
             </a:r>
           </a:p>
         </p:txBody>
@@ -11982,7 +11982,7 @@
                 </a:solidFill>
                 <a:latin typeface="Calibri"/>
               </a:rPr>
-              <a:t>Proceso</a:t>
+              <a:t>Clásicas (Pressman)</a:t>
             </a:r>
           </a:p>
         </p:txBody>
@@ -12017,7 +12017,7 @@
                 </a:solidFill>
                 <a:latin typeface="Calibri"/>
               </a:rPr>
-              <a:t>Ciclo Goal→Metric→Acción</a:t>
+              <a:t>Tasa de defectos</a:t>
             </a:r>
           </a:p>
         </p:txBody>
@@ -12052,7 +12052,7 @@
                 </a:solidFill>
                 <a:latin typeface="Calibri"/>
               </a:rPr>
-              <a:t>Documentado en daily MD</a:t>
+              <a:t>1.75 bugs/KLOC</a:t>
             </a:r>
           </a:p>
         </p:txBody>
@@ -12087,7 +12087,7 @@
                 </a:solidFill>
                 <a:latin typeface="Calibri"/>
               </a:rPr>
-              <a:t>Daily Scrum semanal</a:t>
+              <a:t>3 bugs / 1.71 KLOC</a:t>
             </a:r>
           </a:p>
         </p:txBody>
@@ -12122,6 +12122,225 @@
                 </a:solidFill>
                 <a:latin typeface="Calibri"/>
               </a:rPr>
+              <a:t>Pressman</a:t>
+            </a:r>
+          </a:p>
+        </p:txBody>
+      </p:sp>
+      <p:sp>
+        <p:nvSpPr>
+          <p:cNvPr id="103" name="Rectangle 102"/>
+          <p:cNvSpPr/>
+          <p:nvPr/>
+        </p:nvSpPr>
+        <p:spPr>
+          <a:xfrm>
+            <a:off x="457200" y="7086600"/>
+            <a:ext cx="11247120" cy="320040"/>
+          </a:xfrm>
+          <a:prstGeom prst="rect">
+            <a:avLst/>
+          </a:prstGeom>
+          <a:solidFill>
+            <a:srgbClr val="ECF2F4"/>
+          </a:solidFill>
+          <a:ln>
+            <a:noFill/>
+          </a:ln>
+          <a:effectLst/>
+        </p:spPr>
+        <p:style>
+          <a:lnRef idx="1">
+            <a:schemeClr val="accent1"/>
+          </a:lnRef>
+          <a:fillRef idx="3">
+            <a:schemeClr val="accent1"/>
+          </a:fillRef>
+          <a:effectRef idx="2">
+            <a:schemeClr val="accent1"/>
+          </a:effectRef>
+          <a:fontRef idx="minor">
+            <a:schemeClr val="lt1"/>
+          </a:fontRef>
+        </p:style>
+        <p:txBody>
+          <a:bodyPr rtlCol="0" anchor="ctr"/>
+          <a:lstStyle/>
+          <a:p>
+            <a:pPr algn="ctr"/>
+          </a:p>
+        </p:txBody>
+      </p:sp>
+      <p:sp>
+        <p:nvSpPr>
+          <p:cNvPr id="104" name="TextBox 103"/>
+          <p:cNvSpPr txBox="1"/>
+          <p:nvPr/>
+        </p:nvSpPr>
+        <p:spPr>
+          <a:xfrm>
+            <a:off x="548640" y="7141464"/>
+            <a:ext cx="1737360" cy="274320"/>
+          </a:xfrm>
+          <a:prstGeom prst="rect">
+            <a:avLst/>
+          </a:prstGeom>
+          <a:noFill/>
+        </p:spPr>
+        <p:txBody>
+          <a:bodyPr wrap="square" lIns="0" rIns="0" tIns="0" bIns="0">
+            <a:spAutoFit/>
+          </a:bodyPr>
+          <a:lstStyle/>
+          <a:p>
+            <a:pPr algn="l"/>
+            <a:r>
+              <a:rPr sz="900" b="1">
+                <a:solidFill>
+                  <a:srgbClr val="0A8478"/>
+                </a:solidFill>
+                <a:latin typeface="Calibri"/>
+              </a:rPr>
+              <a:t>Proceso</a:t>
+            </a:r>
+          </a:p>
+        </p:txBody>
+      </p:sp>
+      <p:sp>
+        <p:nvSpPr>
+          <p:cNvPr id="105" name="TextBox 104"/>
+          <p:cNvSpPr txBox="1"/>
+          <p:nvPr/>
+        </p:nvSpPr>
+        <p:spPr>
+          <a:xfrm>
+            <a:off x="2377440" y="7141464"/>
+            <a:ext cx="3108960" cy="274320"/>
+          </a:xfrm>
+          <a:prstGeom prst="rect">
+            <a:avLst/>
+          </a:prstGeom>
+          <a:noFill/>
+        </p:spPr>
+        <p:txBody>
+          <a:bodyPr wrap="square" lIns="0" rIns="0" tIns="0" bIns="0">
+            <a:spAutoFit/>
+          </a:bodyPr>
+          <a:lstStyle/>
+          <a:p>
+            <a:pPr algn="l"/>
+            <a:r>
+              <a:rPr sz="900" b="0">
+                <a:solidFill>
+                  <a:srgbClr val="0F2A36"/>
+                </a:solidFill>
+                <a:latin typeface="Calibri"/>
+              </a:rPr>
+              <a:t>Ciclo Goal→Metric→Acción</a:t>
+            </a:r>
+          </a:p>
+        </p:txBody>
+      </p:sp>
+      <p:sp>
+        <p:nvSpPr>
+          <p:cNvPr id="106" name="TextBox 105"/>
+          <p:cNvSpPr txBox="1"/>
+          <p:nvPr/>
+        </p:nvSpPr>
+        <p:spPr>
+          <a:xfrm>
+            <a:off x="5577840" y="7141464"/>
+            <a:ext cx="2468880" cy="274320"/>
+          </a:xfrm>
+          <a:prstGeom prst="rect">
+            <a:avLst/>
+          </a:prstGeom>
+          <a:noFill/>
+        </p:spPr>
+        <p:txBody>
+          <a:bodyPr wrap="square" lIns="0" rIns="0" tIns="0" bIns="0">
+            <a:spAutoFit/>
+          </a:bodyPr>
+          <a:lstStyle/>
+          <a:p>
+            <a:pPr algn="l"/>
+            <a:r>
+              <a:rPr sz="900" b="0">
+                <a:solidFill>
+                  <a:srgbClr val="0F2A36"/>
+                </a:solidFill>
+                <a:latin typeface="Calibri"/>
+              </a:rPr>
+              <a:t>Documentado en daily MD</a:t>
+            </a:r>
+          </a:p>
+        </p:txBody>
+      </p:sp>
+      <p:sp>
+        <p:nvSpPr>
+          <p:cNvPr id="107" name="TextBox 106"/>
+          <p:cNvSpPr txBox="1"/>
+          <p:nvPr/>
+        </p:nvSpPr>
+        <p:spPr>
+          <a:xfrm>
+            <a:off x="8138160" y="7141464"/>
+            <a:ext cx="1920240" cy="274320"/>
+          </a:xfrm>
+          <a:prstGeom prst="rect">
+            <a:avLst/>
+          </a:prstGeom>
+          <a:noFill/>
+        </p:spPr>
+        <p:txBody>
+          <a:bodyPr wrap="square" lIns="0" rIns="0" tIns="0" bIns="0">
+            <a:spAutoFit/>
+          </a:bodyPr>
+          <a:lstStyle/>
+          <a:p>
+            <a:pPr algn="l"/>
+            <a:r>
+              <a:rPr sz="900" b="0">
+                <a:solidFill>
+                  <a:srgbClr val="0F2A36"/>
+                </a:solidFill>
+                <a:latin typeface="Calibri"/>
+              </a:rPr>
+              <a:t>Daily Scrum semanal</a:t>
+            </a:r>
+          </a:p>
+        </p:txBody>
+      </p:sp>
+      <p:sp>
+        <p:nvSpPr>
+          <p:cNvPr id="108" name="TextBox 107"/>
+          <p:cNvSpPr txBox="1"/>
+          <p:nvPr/>
+        </p:nvSpPr>
+        <p:spPr>
+          <a:xfrm>
+            <a:off x="10149840" y="7141464"/>
+            <a:ext cx="1554480" cy="274320"/>
+          </a:xfrm>
+          <a:prstGeom prst="rect">
+            <a:avLst/>
+          </a:prstGeom>
+          <a:noFill/>
+        </p:spPr>
+        <p:txBody>
+          <a:bodyPr wrap="square" lIns="0" rIns="0" tIns="0" bIns="0">
+            <a:spAutoFit/>
+          </a:bodyPr>
+          <a:lstStyle/>
+          <a:p>
+            <a:pPr algn="l"/>
+            <a:r>
+              <a:rPr sz="900" b="1">
+                <a:solidFill>
+                  <a:srgbClr val="0A8478"/>
+                </a:solidFill>
+                <a:latin typeface="Calibri"/>
+              </a:rPr>
               <a:t>TQM</a:t>
             </a:r>
           </a:p>
@@ -12129,7 +12348,7 @@
       </p:sp>
       <p:sp>
         <p:nvSpPr>
-          <p:cNvPr id="103" name="Rectangle 102"/>
+          <p:cNvPr id="109" name="Rectangle 108"/>
           <p:cNvSpPr/>
           <p:nvPr/>
         </p:nvSpPr>
@@ -12173,7 +12392,7 @@
       </p:sp>
       <p:sp>
         <p:nvSpPr>
-          <p:cNvPr id="104" name="TextBox 103"/>
+          <p:cNvPr id="110" name="TextBox 109"/>
           <p:cNvSpPr txBox="1"/>
           <p:nvPr/>
         </p:nvSpPr>

--- a/dailys/Daily_S2_Sprint1_HELIOS.pptx
+++ b/dailys/Daily_S2_Sprint1_HELIOS.pptx
@@ -6939,7 +6939,7 @@
                 </a:solidFill>
                 <a:latin typeface="Calibri"/>
               </a:rPr>
-              <a:t>Stack muy nuevo (React 19.2 + TS 6 + Vite 8)</a:t>
+              <a:t>Registro duplicado: auth sin paciente mostraba 'Crear cuenta'</a:t>
             </a:r>
           </a:p>
         </p:txBody>
@@ -6974,7 +6974,7 @@
                 </a:solidFill>
                 <a:latin typeface="Calibri"/>
               </a:rPr>
-              <a:t>TypeScript falla con tipos genéricos en cliente Supabase</a:t>
+              <a:t>Usuarias logueadas veían form de registro en blanco tras correr el seed</a:t>
             </a:r>
           </a:p>
         </p:txBody>
@@ -7009,7 +7009,7 @@
                 </a:solidFill>
                 <a:latin typeface="Calibri"/>
               </a:rPr>
-              <a:t>→ Mitigación: cliente sin tipado genérico para Sprint 1 + ticket de codegen para Sprint 2.</a:t>
+              <a:t>→ Mitigación: Register.tsx detecta 3 escenarios (cargando/completo/falta perfil) y muestra UI 'Completa tu perfil'.</a:t>
             </a:r>
           </a:p>
         </p:txBody>
@@ -7186,7 +7186,7 @@
                 </a:solidFill>
                 <a:latin typeface="Calibri"/>
               </a:rPr>
-              <a:t>Validación de cédula panameña rechazaba PE-12-345</a:t>
+              <a:t>Toolbar de navegación no respondía a clicks</a:t>
             </a:r>
           </a:p>
         </p:txBody>
@@ -7221,7 +7221,7 @@
                 </a:solidFill>
                 <a:latin typeface="Calibri"/>
               </a:rPr>
-              <a:t>El regex inicial era demasiado estricto</a:t>
+              <a:t>Calendario tapaba los NavLinks del header (sin stacking context)</a:t>
             </a:r>
           </a:p>
         </p:txBody>
@@ -7256,7 +7256,7 @@
                 </a:solidFill>
                 <a:latin typeface="Calibri"/>
               </a:rPr>
-              <a:t>→ Mitigación: simplificada a '5-12 dígitos tras quitar prefijo y guiones' + 7 casos de prueba.</a:t>
+              <a:t>→ Mitigación: sticky top-0 z-50 en &lt;header&gt; de AppLayout + z-10 en &lt;nav&gt;.</a:t>
             </a:r>
           </a:p>
         </p:txBody>
@@ -7433,7 +7433,7 @@
                 </a:solidFill>
                 <a:latin typeface="Calibri"/>
               </a:rPr>
-              <a:t>Vitest 4 mock hoisting con variables externas</a:t>
+              <a:t>Seed destructivo borraba citas de usuarias reales</a:t>
             </a:r>
           </a:p>
         </p:txBody>
@@ -7468,7 +7468,7 @@
                 </a:solidFill>
                 <a:latin typeface="Calibri"/>
               </a:rPr>
-              <a:t>Tests fallaban con 'Cannot access X before initialization'</a:t>
+              <a:t>reset_tables() ejecutaba DELETE en citas/pacientes/auth_paciente_link</a:t>
             </a:r>
           </a:p>
         </p:txBody>
@@ -7503,7 +7503,7 @@
                 </a:solidFill>
                 <a:latin typeface="Calibri"/>
               </a:rPr>
-              <a:t>→ Mitigación: usar vi.hoisted() para variables compartidas entre mock y test.</a:t>
+              <a:t>→ Mitigación: reset_tables() solo borra catálogo. Datos de usuarios preservados.</a:t>
             </a:r>
           </a:p>
         </p:txBody>
@@ -12052,7 +12052,7 @@
                 </a:solidFill>
                 <a:latin typeface="Calibri"/>
               </a:rPr>
-              <a:t>1.75 bugs/KLOC</a:t>
+              <a:t>3.51 bugs/KLOC</a:t>
             </a:r>
           </a:p>
         </p:txBody>
@@ -12087,7 +12087,7 @@
                 </a:solidFill>
                 <a:latin typeface="Calibri"/>
               </a:rPr>
-              <a:t>3 bugs / 1.71 KLOC</a:t>
+              <a:t>6 bugs / 1.71 KLOC</a:t>
             </a:r>
           </a:p>
         </p:txBody>

--- a/dailys/Daily_S2_Sprint1_HELIOS.pptx
+++ b/dailys/Daily_S2_Sprint1_HELIOS.pptx
@@ -3527,7 +3527,7 @@
                 </a:solidFill>
                 <a:latin typeface="Calibri"/>
               </a:rPr>
-              <a:t>Universidad Tecnológica de Panamá · 26 de May de 2026</a:t>
+              <a:t>Universidad Tecnológica de Panamá · 27 de May de 2026</a:t>
             </a:r>
           </a:p>
         </p:txBody>
@@ -7567,7 +7567,7 @@
             <a:avLst/>
           </a:prstGeom>
           <a:solidFill>
-            <a:srgbClr val="CA8A04"/>
+            <a:srgbClr val="3DDC97"/>
           </a:solidFill>
           <a:ln>
             <a:noFill/>
@@ -7613,7 +7613,7 @@
             </a:avLst>
           </a:prstGeom>
           <a:solidFill>
-            <a:srgbClr val="CA8A04"/>
+            <a:srgbClr val="3DDC97"/>
           </a:solidFill>
           <a:ln>
             <a:noFill/>
@@ -7645,7 +7645,7 @@
                 </a:solidFill>
                 <a:latin typeface="Calibri"/>
               </a:rPr>
-              <a:t>EN CURSO</a:t>
+              <a:t>RESUELTO</a:t>
             </a:r>
           </a:p>
         </p:txBody>
@@ -7680,7 +7680,7 @@
                 </a:solidFill>
                 <a:latin typeface="Calibri"/>
               </a:rPr>
-              <a:t>RLS permisivo en Sprint 1</a:t>
+              <a:t>Loading infinito 'Verificando sesión...' en useAuth.tsx</a:t>
             </a:r>
           </a:p>
         </p:txBody>
@@ -7715,7 +7715,7 @@
                 </a:solidFill>
                 <a:latin typeface="Calibri"/>
               </a:rPr>
-              <a:t>Política USING (true) permite ver datos de otros pacientes</a:t>
+              <a:t>Supabase fallando (cold start/RLS) dejaba setLoading(true) para siempre</a:t>
             </a:r>
           </a:p>
         </p:txBody>
@@ -7750,7 +7750,7 @@
                 </a:solidFill>
                 <a:latin typeface="Calibri"/>
               </a:rPr>
-              <a:t>→ Mitigación: documentado como deuda técnica conocida. Primer ticket del Sprint 2.</a:t>
+              <a:t>→ Mitigación: try/catch/finally garantiza setLoading(false) + race condition fix con useRef.</a:t>
             </a:r>
           </a:p>
         </p:txBody>
@@ -7814,6 +7814,253 @@
             <a:avLst/>
           </a:prstGeom>
           <a:solidFill>
+            <a:srgbClr val="CA8A04"/>
+          </a:solidFill>
+          <a:ln>
+            <a:noFill/>
+          </a:ln>
+          <a:effectLst/>
+        </p:spPr>
+        <p:style>
+          <a:lnRef idx="1">
+            <a:schemeClr val="accent1"/>
+          </a:lnRef>
+          <a:fillRef idx="3">
+            <a:schemeClr val="accent1"/>
+          </a:fillRef>
+          <a:effectRef idx="2">
+            <a:schemeClr val="accent1"/>
+          </a:effectRef>
+          <a:fontRef idx="minor">
+            <a:schemeClr val="lt1"/>
+          </a:fontRef>
+        </p:style>
+        <p:txBody>
+          <a:bodyPr rtlCol="0" anchor="ctr"/>
+          <a:lstStyle/>
+          <a:p>
+            <a:pPr algn="ctr"/>
+          </a:p>
+        </p:txBody>
+      </p:sp>
+      <p:sp>
+        <p:nvSpPr>
+          <p:cNvPr id="33" name="Rounded Rectangle 32"/>
+          <p:cNvSpPr/>
+          <p:nvPr/>
+        </p:nvSpPr>
+        <p:spPr>
+          <a:xfrm>
+            <a:off x="685800" y="5413248"/>
+            <a:ext cx="1005840" cy="274320"/>
+          </a:xfrm>
+          <a:prstGeom prst="roundRect">
+            <a:avLst>
+              <a:gd name="adj" fmla="val 50000"/>
+            </a:avLst>
+          </a:prstGeom>
+          <a:solidFill>
+            <a:srgbClr val="CA8A04"/>
+          </a:solidFill>
+          <a:ln>
+            <a:noFill/>
+          </a:ln>
+        </p:spPr>
+        <p:style>
+          <a:lnRef idx="1">
+            <a:schemeClr val="accent1"/>
+          </a:lnRef>
+          <a:fillRef idx="3">
+            <a:schemeClr val="accent1"/>
+          </a:fillRef>
+          <a:effectRef idx="2">
+            <a:schemeClr val="accent1"/>
+          </a:effectRef>
+          <a:fontRef idx="minor">
+            <a:schemeClr val="lt1"/>
+          </a:fontRef>
+        </p:style>
+        <p:txBody>
+          <a:bodyPr rtlCol="0" anchor="ctr" lIns="0" rIns="0" tIns="0" bIns="0"/>
+          <a:lstStyle/>
+          <a:p>
+            <a:pPr algn="ctr"/>
+            <a:r>
+              <a:rPr sz="900" b="1">
+                <a:solidFill>
+                  <a:srgbClr val="FFFFFF"/>
+                </a:solidFill>
+                <a:latin typeface="Calibri"/>
+              </a:rPr>
+              <a:t>EN CURSO</a:t>
+            </a:r>
+          </a:p>
+        </p:txBody>
+      </p:sp>
+      <p:sp>
+        <p:nvSpPr>
+          <p:cNvPr id="34" name="TextBox 33"/>
+          <p:cNvSpPr txBox="1"/>
+          <p:nvPr/>
+        </p:nvSpPr>
+        <p:spPr>
+          <a:xfrm>
+            <a:off x="1828800" y="5376672"/>
+            <a:ext cx="9601200" cy="320040"/>
+          </a:xfrm>
+          <a:prstGeom prst="rect">
+            <a:avLst/>
+          </a:prstGeom>
+          <a:noFill/>
+        </p:spPr>
+        <p:txBody>
+          <a:bodyPr wrap="square" lIns="0" rIns="0" tIns="0" bIns="0">
+            <a:spAutoFit/>
+          </a:bodyPr>
+          <a:lstStyle/>
+          <a:p>
+            <a:pPr algn="l"/>
+            <a:r>
+              <a:rPr sz="1200" b="1">
+                <a:solidFill>
+                  <a:srgbClr val="0F2A36"/>
+                </a:solidFill>
+                <a:latin typeface="Calibri"/>
+              </a:rPr>
+              <a:t>RLS permisivo en Sprint 1</a:t>
+            </a:r>
+          </a:p>
+        </p:txBody>
+      </p:sp>
+      <p:sp>
+        <p:nvSpPr>
+          <p:cNvPr id="35" name="TextBox 34"/>
+          <p:cNvSpPr txBox="1"/>
+          <p:nvPr/>
+        </p:nvSpPr>
+        <p:spPr>
+          <a:xfrm>
+            <a:off x="1828800" y="5669280"/>
+            <a:ext cx="9601200" cy="274320"/>
+          </a:xfrm>
+          <a:prstGeom prst="rect">
+            <a:avLst/>
+          </a:prstGeom>
+          <a:noFill/>
+        </p:spPr>
+        <p:txBody>
+          <a:bodyPr wrap="square" lIns="0" rIns="0" tIns="0" bIns="0">
+            <a:spAutoFit/>
+          </a:bodyPr>
+          <a:lstStyle/>
+          <a:p>
+            <a:pPr algn="l"/>
+            <a:r>
+              <a:rPr sz="1000" b="0">
+                <a:solidFill>
+                  <a:srgbClr val="4A6B7A"/>
+                </a:solidFill>
+                <a:latin typeface="Calibri"/>
+              </a:rPr>
+              <a:t>Política USING (true) permite ver datos de otros pacientes</a:t>
+            </a:r>
+          </a:p>
+        </p:txBody>
+      </p:sp>
+      <p:sp>
+        <p:nvSpPr>
+          <p:cNvPr id="36" name="TextBox 35"/>
+          <p:cNvSpPr txBox="1"/>
+          <p:nvPr/>
+        </p:nvSpPr>
+        <p:spPr>
+          <a:xfrm>
+            <a:off x="1828800" y="5852160"/>
+            <a:ext cx="9601200" cy="274320"/>
+          </a:xfrm>
+          <a:prstGeom prst="rect">
+            <a:avLst/>
+          </a:prstGeom>
+          <a:noFill/>
+        </p:spPr>
+        <p:txBody>
+          <a:bodyPr wrap="square" lIns="0" rIns="0" tIns="0" bIns="0">
+            <a:spAutoFit/>
+          </a:bodyPr>
+          <a:lstStyle/>
+          <a:p>
+            <a:pPr algn="l"/>
+            <a:r>
+              <a:rPr sz="1000" b="0">
+                <a:solidFill>
+                  <a:srgbClr val="0A8478"/>
+                </a:solidFill>
+                <a:latin typeface="Calibri"/>
+              </a:rPr>
+              <a:t>→ Mitigación: documentado como deuda técnica conocida. Primer ticket del Sprint 2.</a:t>
+            </a:r>
+          </a:p>
+        </p:txBody>
+      </p:sp>
+      <p:sp>
+        <p:nvSpPr>
+          <p:cNvPr id="37" name="Rectangle 36"/>
+          <p:cNvSpPr/>
+          <p:nvPr/>
+        </p:nvSpPr>
+        <p:spPr>
+          <a:xfrm>
+            <a:off x="457200" y="6080760"/>
+            <a:ext cx="11247120" cy="685800"/>
+          </a:xfrm>
+          <a:prstGeom prst="rect">
+            <a:avLst/>
+          </a:prstGeom>
+          <a:solidFill>
+            <a:srgbClr val="FFFFFF"/>
+          </a:solidFill>
+          <a:ln>
+            <a:noFill/>
+          </a:ln>
+          <a:effectLst/>
+        </p:spPr>
+        <p:style>
+          <a:lnRef idx="1">
+            <a:schemeClr val="accent1"/>
+          </a:lnRef>
+          <a:fillRef idx="3">
+            <a:schemeClr val="accent1"/>
+          </a:fillRef>
+          <a:effectRef idx="2">
+            <a:schemeClr val="accent1"/>
+          </a:effectRef>
+          <a:fontRef idx="minor">
+            <a:schemeClr val="lt1"/>
+          </a:fontRef>
+        </p:style>
+        <p:txBody>
+          <a:bodyPr rtlCol="0" anchor="ctr"/>
+          <a:lstStyle/>
+          <a:p>
+            <a:pPr algn="ctr"/>
+          </a:p>
+        </p:txBody>
+      </p:sp>
+      <p:sp>
+        <p:nvSpPr>
+          <p:cNvPr id="38" name="Rectangle 37"/>
+          <p:cNvSpPr/>
+          <p:nvPr/>
+        </p:nvSpPr>
+        <p:spPr>
+          <a:xfrm>
+            <a:off x="457200" y="6080760"/>
+            <a:ext cx="91440" cy="685800"/>
+          </a:xfrm>
+          <a:prstGeom prst="rect">
+            <a:avLst/>
+          </a:prstGeom>
+          <a:solidFill>
             <a:srgbClr val="B91C1C"/>
           </a:solidFill>
           <a:ln>
@@ -7845,13 +8092,13 @@
       </p:sp>
       <p:sp>
         <p:nvSpPr>
-          <p:cNvPr id="33" name="Rounded Rectangle 32"/>
+          <p:cNvPr id="39" name="Rounded Rectangle 38"/>
           <p:cNvSpPr/>
           <p:nvPr/>
         </p:nvSpPr>
         <p:spPr>
           <a:xfrm>
-            <a:off x="685800" y="5413248"/>
+            <a:off x="685800" y="6190488"/>
             <a:ext cx="1005840" cy="274320"/>
           </a:xfrm>
           <a:prstGeom prst="roundRect">
@@ -7899,13 +8146,13 @@
       </p:sp>
       <p:sp>
         <p:nvSpPr>
-          <p:cNvPr id="34" name="TextBox 33"/>
-          <p:cNvSpPr txBox="1"/>
-          <p:nvPr/>
-        </p:nvSpPr>
-        <p:spPr>
-          <a:xfrm>
-            <a:off x="1828800" y="5376672"/>
+          <p:cNvPr id="40" name="TextBox 39"/>
+          <p:cNvSpPr txBox="1"/>
+          <p:nvPr/>
+        </p:nvSpPr>
+        <p:spPr>
+          <a:xfrm>
+            <a:off x="1828800" y="6153912"/>
             <a:ext cx="9601200" cy="320040"/>
           </a:xfrm>
           <a:prstGeom prst="rect">
@@ -7934,13 +8181,13 @@
       </p:sp>
       <p:sp>
         <p:nvSpPr>
-          <p:cNvPr id="35" name="TextBox 34"/>
-          <p:cNvSpPr txBox="1"/>
-          <p:nvPr/>
-        </p:nvSpPr>
-        <p:spPr>
-          <a:xfrm>
-            <a:off x="1828800" y="5669280"/>
+          <p:cNvPr id="41" name="TextBox 40"/>
+          <p:cNvSpPr txBox="1"/>
+          <p:nvPr/>
+        </p:nvSpPr>
+        <p:spPr>
+          <a:xfrm>
+            <a:off x="1828800" y="6446520"/>
             <a:ext cx="9601200" cy="274320"/>
           </a:xfrm>
           <a:prstGeom prst="rect">
@@ -7969,13 +8216,13 @@
       </p:sp>
       <p:sp>
         <p:nvSpPr>
-          <p:cNvPr id="36" name="TextBox 35"/>
-          <p:cNvSpPr txBox="1"/>
-          <p:nvPr/>
-        </p:nvSpPr>
-        <p:spPr>
-          <a:xfrm>
-            <a:off x="1828800" y="5852160"/>
+          <p:cNvPr id="42" name="TextBox 41"/>
+          <p:cNvSpPr txBox="1"/>
+          <p:nvPr/>
+        </p:nvSpPr>
+        <p:spPr>
+          <a:xfrm>
+            <a:off x="1828800" y="6629400"/>
             <a:ext cx="9601200" cy="274320"/>
           </a:xfrm>
           <a:prstGeom prst="rect">
@@ -8004,7 +8251,7 @@
       </p:sp>
       <p:sp>
         <p:nvSpPr>
-          <p:cNvPr id="37" name="TextBox 36"/>
+          <p:cNvPr id="43" name="TextBox 42"/>
           <p:cNvSpPr txBox="1"/>
           <p:nvPr/>
         </p:nvSpPr>
@@ -12052,7 +12299,7 @@
                 </a:solidFill>
                 <a:latin typeface="Calibri"/>
               </a:rPr>
-              <a:t>3.51 bugs/KLOC</a:t>
+              <a:t>4.09 bugs/KLOC</a:t>
             </a:r>
           </a:p>
         </p:txBody>
@@ -12087,7 +12334,7 @@
                 </a:solidFill>
                 <a:latin typeface="Calibri"/>
               </a:rPr>
-              <a:t>6 bugs / 1.71 KLOC</a:t>
+              <a:t>7 bugs / 1.71 KLOC</a:t>
             </a:r>
           </a:p>
         </p:txBody>

--- a/dailys/Daily_S2_Sprint1_HELIOS.pptx
+++ b/dailys/Daily_S2_Sprint1_HELIOS.pptx
@@ -7680,7 +7680,7 @@
                 </a:solidFill>
                 <a:latin typeface="Calibri"/>
               </a:rPr>
-              <a:t>Loading infinito 'Verificando sesión...' en useAuth.tsx</a:t>
+              <a:t>Loading infinito en useAuth + 5 hooks de datos</a:t>
             </a:r>
           </a:p>
         </p:txBody>
@@ -7715,7 +7715,7 @@
                 </a:solidFill>
                 <a:latin typeface="Calibri"/>
               </a:rPr>
-              <a:t>Supabase fallando (cold start/RLS) dejaba setLoading(true) para siempre</a:t>
+              <a:t>Mismo patrón roto en useCitas, useEspecialidades, useSedes, useMedicos, useHorarios</a:t>
             </a:r>
           </a:p>
         </p:txBody>
@@ -7750,7 +7750,7 @@
                 </a:solidFill>
                 <a:latin typeface="Calibri"/>
               </a:rPr>
-              <a:t>→ Mitigación: try/catch/finally garantiza setLoading(false) + race condition fix con useRef.</a:t>
+              <a:t>→ Mitigación: try/catch/finally consistente + race condition guard en useCitas (HIGH detectado por code-reviewer).</a:t>
             </a:r>
           </a:p>
         </p:txBody>
@@ -7814,7 +7814,7 @@
             <a:avLst/>
           </a:prstGeom>
           <a:solidFill>
-            <a:srgbClr val="CA8A04"/>
+            <a:srgbClr val="3DDC97"/>
           </a:solidFill>
           <a:ln>
             <a:noFill/>
@@ -7860,7 +7860,7 @@
             </a:avLst>
           </a:prstGeom>
           <a:solidFill>
-            <a:srgbClr val="CA8A04"/>
+            <a:srgbClr val="3DDC97"/>
           </a:solidFill>
           <a:ln>
             <a:noFill/>
@@ -7892,7 +7892,7 @@
                 </a:solidFill>
                 <a:latin typeface="Calibri"/>
               </a:rPr>
-              <a:t>EN CURSO</a:t>
+              <a:t>RESUELTO</a:t>
             </a:r>
           </a:p>
         </p:txBody>
@@ -7927,7 +7927,7 @@
                 </a:solidFill>
                 <a:latin typeface="Calibri"/>
               </a:rPr>
-              <a:t>RLS permisivo en Sprint 1</a:t>
+              <a:t>Sesión persistente entre pestañas (riesgo seguridad)</a:t>
             </a:r>
           </a:p>
         </p:txBody>
@@ -7962,7 +7962,7 @@
                 </a:solidFill>
                 <a:latin typeface="Calibri"/>
               </a:rPr>
-              <a:t>Política USING (true) permite ver datos de otros pacientes</a:t>
+              <a:t>Supabase usaba localStorage por defecto - sesión persistía indefinidamente</a:t>
             </a:r>
           </a:p>
         </p:txBody>
@@ -7997,7 +7997,7 @@
                 </a:solidFill>
                 <a:latin typeface="Calibri"/>
               </a:rPr>
-              <a:t>→ Mitigación: documentado como deuda técnica conocida. Primer ticket del Sprint 2.</a:t>
+              <a:t>→ Mitigación: storage: sessionStorage. Cerrar tab borra sesión. Cumple HIPAA.</a:t>
             </a:r>
           </a:p>
         </p:txBody>
@@ -8061,6 +8061,253 @@
             <a:avLst/>
           </a:prstGeom>
           <a:solidFill>
+            <a:srgbClr val="CA8A04"/>
+          </a:solidFill>
+          <a:ln>
+            <a:noFill/>
+          </a:ln>
+          <a:effectLst/>
+        </p:spPr>
+        <p:style>
+          <a:lnRef idx="1">
+            <a:schemeClr val="accent1"/>
+          </a:lnRef>
+          <a:fillRef idx="3">
+            <a:schemeClr val="accent1"/>
+          </a:fillRef>
+          <a:effectRef idx="2">
+            <a:schemeClr val="accent1"/>
+          </a:effectRef>
+          <a:fontRef idx="minor">
+            <a:schemeClr val="lt1"/>
+          </a:fontRef>
+        </p:style>
+        <p:txBody>
+          <a:bodyPr rtlCol="0" anchor="ctr"/>
+          <a:lstStyle/>
+          <a:p>
+            <a:pPr algn="ctr"/>
+          </a:p>
+        </p:txBody>
+      </p:sp>
+      <p:sp>
+        <p:nvSpPr>
+          <p:cNvPr id="39" name="Rounded Rectangle 38"/>
+          <p:cNvSpPr/>
+          <p:nvPr/>
+        </p:nvSpPr>
+        <p:spPr>
+          <a:xfrm>
+            <a:off x="685800" y="6190488"/>
+            <a:ext cx="1005840" cy="274320"/>
+          </a:xfrm>
+          <a:prstGeom prst="roundRect">
+            <a:avLst>
+              <a:gd name="adj" fmla="val 50000"/>
+            </a:avLst>
+          </a:prstGeom>
+          <a:solidFill>
+            <a:srgbClr val="CA8A04"/>
+          </a:solidFill>
+          <a:ln>
+            <a:noFill/>
+          </a:ln>
+        </p:spPr>
+        <p:style>
+          <a:lnRef idx="1">
+            <a:schemeClr val="accent1"/>
+          </a:lnRef>
+          <a:fillRef idx="3">
+            <a:schemeClr val="accent1"/>
+          </a:fillRef>
+          <a:effectRef idx="2">
+            <a:schemeClr val="accent1"/>
+          </a:effectRef>
+          <a:fontRef idx="minor">
+            <a:schemeClr val="lt1"/>
+          </a:fontRef>
+        </p:style>
+        <p:txBody>
+          <a:bodyPr rtlCol="0" anchor="ctr" lIns="0" rIns="0" tIns="0" bIns="0"/>
+          <a:lstStyle/>
+          <a:p>
+            <a:pPr algn="ctr"/>
+            <a:r>
+              <a:rPr sz="900" b="1">
+                <a:solidFill>
+                  <a:srgbClr val="FFFFFF"/>
+                </a:solidFill>
+                <a:latin typeface="Calibri"/>
+              </a:rPr>
+              <a:t>EN CURSO</a:t>
+            </a:r>
+          </a:p>
+        </p:txBody>
+      </p:sp>
+      <p:sp>
+        <p:nvSpPr>
+          <p:cNvPr id="40" name="TextBox 39"/>
+          <p:cNvSpPr txBox="1"/>
+          <p:nvPr/>
+        </p:nvSpPr>
+        <p:spPr>
+          <a:xfrm>
+            <a:off x="1828800" y="6153912"/>
+            <a:ext cx="9601200" cy="320040"/>
+          </a:xfrm>
+          <a:prstGeom prst="rect">
+            <a:avLst/>
+          </a:prstGeom>
+          <a:noFill/>
+        </p:spPr>
+        <p:txBody>
+          <a:bodyPr wrap="square" lIns="0" rIns="0" tIns="0" bIns="0">
+            <a:spAutoFit/>
+          </a:bodyPr>
+          <a:lstStyle/>
+          <a:p>
+            <a:pPr algn="l"/>
+            <a:r>
+              <a:rPr sz="1200" b="1">
+                <a:solidFill>
+                  <a:srgbClr val="0F2A36"/>
+                </a:solidFill>
+                <a:latin typeface="Calibri"/>
+              </a:rPr>
+              <a:t>RLS permisivo en Sprint 1</a:t>
+            </a:r>
+          </a:p>
+        </p:txBody>
+      </p:sp>
+      <p:sp>
+        <p:nvSpPr>
+          <p:cNvPr id="41" name="TextBox 40"/>
+          <p:cNvSpPr txBox="1"/>
+          <p:nvPr/>
+        </p:nvSpPr>
+        <p:spPr>
+          <a:xfrm>
+            <a:off x="1828800" y="6446520"/>
+            <a:ext cx="9601200" cy="274320"/>
+          </a:xfrm>
+          <a:prstGeom prst="rect">
+            <a:avLst/>
+          </a:prstGeom>
+          <a:noFill/>
+        </p:spPr>
+        <p:txBody>
+          <a:bodyPr wrap="square" lIns="0" rIns="0" tIns="0" bIns="0">
+            <a:spAutoFit/>
+          </a:bodyPr>
+          <a:lstStyle/>
+          <a:p>
+            <a:pPr algn="l"/>
+            <a:r>
+              <a:rPr sz="1000" b="0">
+                <a:solidFill>
+                  <a:srgbClr val="4A6B7A"/>
+                </a:solidFill>
+                <a:latin typeface="Calibri"/>
+              </a:rPr>
+              <a:t>Política USING (true) permite ver datos de otros pacientes</a:t>
+            </a:r>
+          </a:p>
+        </p:txBody>
+      </p:sp>
+      <p:sp>
+        <p:nvSpPr>
+          <p:cNvPr id="42" name="TextBox 41"/>
+          <p:cNvSpPr txBox="1"/>
+          <p:nvPr/>
+        </p:nvSpPr>
+        <p:spPr>
+          <a:xfrm>
+            <a:off x="1828800" y="6629400"/>
+            <a:ext cx="9601200" cy="274320"/>
+          </a:xfrm>
+          <a:prstGeom prst="rect">
+            <a:avLst/>
+          </a:prstGeom>
+          <a:noFill/>
+        </p:spPr>
+        <p:txBody>
+          <a:bodyPr wrap="square" lIns="0" rIns="0" tIns="0" bIns="0">
+            <a:spAutoFit/>
+          </a:bodyPr>
+          <a:lstStyle/>
+          <a:p>
+            <a:pPr algn="l"/>
+            <a:r>
+              <a:rPr sz="1000" b="0">
+                <a:solidFill>
+                  <a:srgbClr val="0A8478"/>
+                </a:solidFill>
+                <a:latin typeface="Calibri"/>
+              </a:rPr>
+              <a:t>→ Mitigación: documentado como deuda técnica conocida. Primer ticket del Sprint 2.</a:t>
+            </a:r>
+          </a:p>
+        </p:txBody>
+      </p:sp>
+      <p:sp>
+        <p:nvSpPr>
+          <p:cNvPr id="43" name="Rectangle 42"/>
+          <p:cNvSpPr/>
+          <p:nvPr/>
+        </p:nvSpPr>
+        <p:spPr>
+          <a:xfrm>
+            <a:off x="457200" y="6858000"/>
+            <a:ext cx="11247120" cy="685800"/>
+          </a:xfrm>
+          <a:prstGeom prst="rect">
+            <a:avLst/>
+          </a:prstGeom>
+          <a:solidFill>
+            <a:srgbClr val="FFFFFF"/>
+          </a:solidFill>
+          <a:ln>
+            <a:noFill/>
+          </a:ln>
+          <a:effectLst/>
+        </p:spPr>
+        <p:style>
+          <a:lnRef idx="1">
+            <a:schemeClr val="accent1"/>
+          </a:lnRef>
+          <a:fillRef idx="3">
+            <a:schemeClr val="accent1"/>
+          </a:fillRef>
+          <a:effectRef idx="2">
+            <a:schemeClr val="accent1"/>
+          </a:effectRef>
+          <a:fontRef idx="minor">
+            <a:schemeClr val="lt1"/>
+          </a:fontRef>
+        </p:style>
+        <p:txBody>
+          <a:bodyPr rtlCol="0" anchor="ctr"/>
+          <a:lstStyle/>
+          <a:p>
+            <a:pPr algn="ctr"/>
+          </a:p>
+        </p:txBody>
+      </p:sp>
+      <p:sp>
+        <p:nvSpPr>
+          <p:cNvPr id="44" name="Rectangle 43"/>
+          <p:cNvSpPr/>
+          <p:nvPr/>
+        </p:nvSpPr>
+        <p:spPr>
+          <a:xfrm>
+            <a:off x="457200" y="6858000"/>
+            <a:ext cx="91440" cy="685800"/>
+          </a:xfrm>
+          <a:prstGeom prst="rect">
+            <a:avLst/>
+          </a:prstGeom>
+          <a:solidFill>
             <a:srgbClr val="B91C1C"/>
           </a:solidFill>
           <a:ln>
@@ -8092,13 +8339,13 @@
       </p:sp>
       <p:sp>
         <p:nvSpPr>
-          <p:cNvPr id="39" name="Rounded Rectangle 38"/>
+          <p:cNvPr id="45" name="Rounded Rectangle 44"/>
           <p:cNvSpPr/>
           <p:nvPr/>
         </p:nvSpPr>
         <p:spPr>
           <a:xfrm>
-            <a:off x="685800" y="6190488"/>
+            <a:off x="685800" y="6967728"/>
             <a:ext cx="1005840" cy="274320"/>
           </a:xfrm>
           <a:prstGeom prst="roundRect">
@@ -8146,13 +8393,13 @@
       </p:sp>
       <p:sp>
         <p:nvSpPr>
-          <p:cNvPr id="40" name="TextBox 39"/>
-          <p:cNvSpPr txBox="1"/>
-          <p:nvPr/>
-        </p:nvSpPr>
-        <p:spPr>
-          <a:xfrm>
-            <a:off x="1828800" y="6153912"/>
+          <p:cNvPr id="46" name="TextBox 45"/>
+          <p:cNvSpPr txBox="1"/>
+          <p:nvPr/>
+        </p:nvSpPr>
+        <p:spPr>
+          <a:xfrm>
+            <a:off x="1828800" y="6931152"/>
             <a:ext cx="9601200" cy="320040"/>
           </a:xfrm>
           <a:prstGeom prst="rect">
@@ -8181,13 +8428,13 @@
       </p:sp>
       <p:sp>
         <p:nvSpPr>
-          <p:cNvPr id="41" name="TextBox 40"/>
-          <p:cNvSpPr txBox="1"/>
-          <p:nvPr/>
-        </p:nvSpPr>
-        <p:spPr>
-          <a:xfrm>
-            <a:off x="1828800" y="6446520"/>
+          <p:cNvPr id="47" name="TextBox 46"/>
+          <p:cNvSpPr txBox="1"/>
+          <p:nvPr/>
+        </p:nvSpPr>
+        <p:spPr>
+          <a:xfrm>
+            <a:off x="1828800" y="7223760"/>
             <a:ext cx="9601200" cy="274320"/>
           </a:xfrm>
           <a:prstGeom prst="rect">
@@ -8216,13 +8463,13 @@
       </p:sp>
       <p:sp>
         <p:nvSpPr>
-          <p:cNvPr id="42" name="TextBox 41"/>
-          <p:cNvSpPr txBox="1"/>
-          <p:nvPr/>
-        </p:nvSpPr>
-        <p:spPr>
-          <a:xfrm>
-            <a:off x="1828800" y="6629400"/>
+          <p:cNvPr id="48" name="TextBox 47"/>
+          <p:cNvSpPr txBox="1"/>
+          <p:nvPr/>
+        </p:nvSpPr>
+        <p:spPr>
+          <a:xfrm>
+            <a:off x="1828800" y="7406640"/>
             <a:ext cx="9601200" cy="274320"/>
           </a:xfrm>
           <a:prstGeom prst="rect">
@@ -8251,7 +8498,7 @@
       </p:sp>
       <p:sp>
         <p:nvSpPr>
-          <p:cNvPr id="43" name="TextBox 42"/>
+          <p:cNvPr id="49" name="TextBox 48"/>
           <p:cNvSpPr txBox="1"/>
           <p:nvPr/>
         </p:nvSpPr>
@@ -12299,7 +12546,7 @@
                 </a:solidFill>
                 <a:latin typeface="Calibri"/>
               </a:rPr>
-              <a:t>4.09 bugs/KLOC</a:t>
+              <a:t>5.26 bugs/KLOC</a:t>
             </a:r>
           </a:p>
         </p:txBody>
@@ -12334,7 +12581,7 @@
                 </a:solidFill>
                 <a:latin typeface="Calibri"/>
               </a:rPr>
-              <a:t>7 bugs / 1.71 KLOC</a:t>
+              <a:t>9 bugs / 1.71 KLOC</a:t>
             </a:r>
           </a:p>
         </p:txBody>
